--- a/static/WAF_Classifier_Capabilities.pptx
+++ b/static/WAF_Classifier_Capabilities.pptx
@@ -18114,7 +18114,7 @@
         <p:spPr>
           <a:xfrm>
             <a:off x="502920" y="1664208"/>
-            <a:ext cx="5394960" cy="658368"/>
+            <a:ext cx="5394960" cy="640080"/>
           </a:xfrm>
           <a:prstGeom prst="roundRect">
             <a:avLst>
@@ -18194,7 +18194,7 @@
         </p:nvSpPr>
         <p:spPr>
           <a:xfrm>
-            <a:off x="1115568" y="1719072"/>
+            <a:off x="1115568" y="1700784"/>
             <a:ext cx="3566160" cy="256032"/>
           </a:xfrm>
           <a:prstGeom prst="rect">
@@ -18210,7 +18210,7 @@
           <a:p>
             <a:pPr algn="l"/>
             <a:r>
-              <a:rPr sz="1100" b="1" i="0">
+              <a:rPr sz="1050" b="1" i="0">
                 <a:solidFill>
                   <a:srgbClr val="0F111A"/>
                 </a:solidFill>
@@ -18228,23 +18228,23 @@
         </p:nvSpPr>
         <p:spPr>
           <a:xfrm>
-            <a:off x="1115568" y="1993392"/>
-            <a:ext cx="3749039" cy="274320"/>
-          </a:xfrm>
-          <a:prstGeom prst="rect">
-            <a:avLst/>
-          </a:prstGeom>
-          <a:noFill/>
-        </p:spPr>
-        <p:txBody>
-          <a:bodyPr wrap="square">
-            <a:spAutoFit/>
-          </a:bodyPr>
-          <a:lstStyle/>
-          <a:p>
-            <a:pPr algn="l"/>
-            <a:r>
-              <a:rPr sz="950" b="0" i="0">
+            <a:off x="1115568" y="1956816"/>
+            <a:ext cx="3749039" cy="310896"/>
+          </a:xfrm>
+          <a:prstGeom prst="rect">
+            <a:avLst/>
+          </a:prstGeom>
+          <a:noFill/>
+        </p:spPr>
+        <p:txBody>
+          <a:bodyPr wrap="square">
+            <a:spAutoFit/>
+          </a:bodyPr>
+          <a:lstStyle/>
+          <a:p>
+            <a:pPr algn="l"/>
+            <a:r>
+              <a:rPr sz="900" b="0" i="0">
                 <a:solidFill>
                   <a:srgbClr val="6B7396"/>
                 </a:solidFill>
@@ -18343,8 +18343,8 @@
         </p:nvSpPr>
         <p:spPr>
           <a:xfrm>
-            <a:off x="502920" y="2414016"/>
-            <a:ext cx="5394960" cy="658368"/>
+            <a:off x="502920" y="2340864"/>
+            <a:ext cx="5394960" cy="640080"/>
           </a:xfrm>
           <a:prstGeom prst="roundRect">
             <a:avLst>
@@ -18390,7 +18390,7 @@
         </p:nvSpPr>
         <p:spPr>
           <a:xfrm>
-            <a:off x="658368" y="2505456"/>
+            <a:off x="658368" y="2432304"/>
             <a:ext cx="347472" cy="457200"/>
           </a:xfrm>
           <a:prstGeom prst="rect">
@@ -18411,7 +18411,7 @@
                   <a:srgbClr val="1E223A"/>
                 </a:solidFill>
               </a:rPr>
-              <a:t>📦</a:t>
+              <a:t>📋</a:t>
             </a:r>
           </a:p>
         </p:txBody>
@@ -18424,7 +18424,7 @@
         </p:nvSpPr>
         <p:spPr>
           <a:xfrm>
-            <a:off x="1115568" y="2468880"/>
+            <a:off x="1115568" y="2377440"/>
             <a:ext cx="3566160" cy="256032"/>
           </a:xfrm>
           <a:prstGeom prst="rect">
@@ -18440,12 +18440,12 @@
           <a:p>
             <a:pPr algn="l"/>
             <a:r>
-              <a:rPr sz="1100" b="1" i="0">
+              <a:rPr sz="1050" b="1" i="0">
                 <a:solidFill>
                   <a:srgbClr val="0F111A"/>
                 </a:solidFill>
               </a:rPr>
-              <a:t>Bulk file verification</a:t>
+              <a:t>Batch-paste classification</a:t>
             </a:r>
           </a:p>
         </p:txBody>
@@ -18458,28 +18458,28 @@
         </p:nvSpPr>
         <p:spPr>
           <a:xfrm>
-            <a:off x="1115568" y="2743200"/>
-            <a:ext cx="3749039" cy="274320"/>
-          </a:xfrm>
-          <a:prstGeom prst="rect">
-            <a:avLst/>
-          </a:prstGeom>
-          <a:noFill/>
-        </p:spPr>
-        <p:txBody>
-          <a:bodyPr wrap="square">
-            <a:spAutoFit/>
-          </a:bodyPr>
-          <a:lstStyle/>
-          <a:p>
-            <a:pPr algn="l"/>
-            <a:r>
-              <a:rPr sz="950" b="0" i="0">
+            <a:off x="1115568" y="2633472"/>
+            <a:ext cx="3749039" cy="310896"/>
+          </a:xfrm>
+          <a:prstGeom prst="rect">
+            <a:avLst/>
+          </a:prstGeom>
+          <a:noFill/>
+        </p:spPr>
+        <p:txBody>
+          <a:bodyPr wrap="square">
+            <a:spAutoFit/>
+          </a:bodyPr>
+          <a:lstStyle/>
+          <a:p>
+            <a:pPr algn="l"/>
+            <a:r>
+              <a:rPr sz="900" b="0" i="0">
                 <a:solidFill>
                   <a:srgbClr val="6B7396"/>
                 </a:solidFill>
               </a:rPr>
-              <a:t>Same classification at scale with concurrent workers</a:t>
+              <a:t>Classify several stories pasted into the chat at once</a:t>
             </a:r>
           </a:p>
         </p:txBody>
@@ -18492,7 +18492,7 @@
         </p:nvSpPr>
         <p:spPr>
           <a:xfrm>
-            <a:off x="5230368" y="2615184"/>
+            <a:off x="5230368" y="2542032"/>
             <a:ext cx="594360" cy="190500"/>
           </a:xfrm>
           <a:prstGeom prst="roundRect">
@@ -18539,7 +18539,7 @@
         </p:nvSpPr>
         <p:spPr>
           <a:xfrm>
-            <a:off x="5212080" y="2596896"/>
+            <a:off x="5212080" y="2523744"/>
             <a:ext cx="640080" cy="215900"/>
           </a:xfrm>
           <a:prstGeom prst="rect">
@@ -18573,8 +18573,8 @@
         </p:nvSpPr>
         <p:spPr>
           <a:xfrm>
-            <a:off x="502920" y="3163824"/>
-            <a:ext cx="5394960" cy="658368"/>
+            <a:off x="502920" y="3017520"/>
+            <a:ext cx="5394960" cy="640080"/>
           </a:xfrm>
           <a:prstGeom prst="roundRect">
             <a:avLst>
@@ -18620,7 +18620,7 @@
         </p:nvSpPr>
         <p:spPr>
           <a:xfrm>
-            <a:off x="658368" y="3255264"/>
+            <a:off x="658368" y="3108960"/>
             <a:ext cx="347472" cy="457200"/>
           </a:xfrm>
           <a:prstGeom prst="rect">
@@ -18641,7 +18641,7 @@
                   <a:srgbClr val="1E223A"/>
                 </a:solidFill>
               </a:rPr>
-              <a:t>📝</a:t>
+              <a:t>📦</a:t>
             </a:r>
           </a:p>
         </p:txBody>
@@ -18654,7 +18654,7 @@
         </p:nvSpPr>
         <p:spPr>
           <a:xfrm>
-            <a:off x="1115568" y="3218688"/>
+            <a:off x="1115568" y="3054096"/>
             <a:ext cx="3566160" cy="256032"/>
           </a:xfrm>
           <a:prstGeom prst="rect">
@@ -18670,12 +18670,12 @@
           <a:p>
             <a:pPr algn="l"/>
             <a:r>
-              <a:rPr sz="1100" b="1" i="0">
+              <a:rPr sz="1050" b="1" i="0">
                 <a:solidFill>
                   <a:srgbClr val="0F111A"/>
                 </a:solidFill>
               </a:rPr>
-              <a:t>Executive narrative</a:t>
+              <a:t>Bulk file verification</a:t>
             </a:r>
           </a:p>
         </p:txBody>
@@ -18688,28 +18688,28 @@
         </p:nvSpPr>
         <p:spPr>
           <a:xfrm>
-            <a:off x="1115568" y="3493008"/>
-            <a:ext cx="3749039" cy="274320"/>
-          </a:xfrm>
-          <a:prstGeom prst="rect">
-            <a:avLst/>
-          </a:prstGeom>
-          <a:noFill/>
-        </p:spPr>
-        <p:txBody>
-          <a:bodyPr wrap="square">
-            <a:spAutoFit/>
-          </a:bodyPr>
-          <a:lstStyle/>
-          <a:p>
-            <a:pPr algn="l"/>
-            <a:r>
-              <a:rPr sz="950" b="0" i="0">
+            <a:off x="1115568" y="3310128"/>
+            <a:ext cx="3749039" cy="310896"/>
+          </a:xfrm>
+          <a:prstGeom prst="rect">
+            <a:avLst/>
+          </a:prstGeom>
+          <a:noFill/>
+        </p:spPr>
+        <p:txBody>
+          <a:bodyPr wrap="square">
+            <a:spAutoFit/>
+          </a:bodyPr>
+          <a:lstStyle/>
+          <a:p>
+            <a:pPr algn="l"/>
+            <a:r>
+              <a:rPr sz="900" b="0" i="0">
                 <a:solidFill>
                   <a:srgbClr val="6B7396"/>
                 </a:solidFill>
               </a:rPr>
-              <a:t>AI-written paragraph summary of classification stats</a:t>
+              <a:t>Same classification at scale with concurrent workers</a:t>
             </a:r>
           </a:p>
         </p:txBody>
@@ -18722,7 +18722,7 @@
         </p:nvSpPr>
         <p:spPr>
           <a:xfrm>
-            <a:off x="5230368" y="3364992"/>
+            <a:off x="5230368" y="3218688"/>
             <a:ext cx="594360" cy="190500"/>
           </a:xfrm>
           <a:prstGeom prst="roundRect">
@@ -18769,7 +18769,7 @@
         </p:nvSpPr>
         <p:spPr>
           <a:xfrm>
-            <a:off x="5212080" y="3346704"/>
+            <a:off x="5212080" y="3200400"/>
             <a:ext cx="640080" cy="215900"/>
           </a:xfrm>
           <a:prstGeom prst="rect">
@@ -18803,8 +18803,8 @@
         </p:nvSpPr>
         <p:spPr>
           <a:xfrm>
-            <a:off x="502920" y="3913632"/>
-            <a:ext cx="5394960" cy="658368"/>
+            <a:off x="502920" y="3694176"/>
+            <a:ext cx="5394960" cy="640080"/>
           </a:xfrm>
           <a:prstGeom prst="roundRect">
             <a:avLst>
@@ -18850,7 +18850,7 @@
         </p:nvSpPr>
         <p:spPr>
           <a:xfrm>
-            <a:off x="658368" y="4005072"/>
+            <a:off x="658368" y="3785616"/>
             <a:ext cx="347472" cy="457200"/>
           </a:xfrm>
           <a:prstGeom prst="rect">
@@ -18871,7 +18871,7 @@
                   <a:srgbClr val="1E223A"/>
                 </a:solidFill>
               </a:rPr>
-              <a:t>🎯</a:t>
+              <a:t>📝</a:t>
             </a:r>
           </a:p>
         </p:txBody>
@@ -18884,7 +18884,7 @@
         </p:nvSpPr>
         <p:spPr>
           <a:xfrm>
-            <a:off x="1115568" y="3968496"/>
+            <a:off x="1115568" y="3730752"/>
             <a:ext cx="3566160" cy="256032"/>
           </a:xfrm>
           <a:prstGeom prst="rect">
@@ -18900,12 +18900,12 @@
           <a:p>
             <a:pPr algn="l"/>
             <a:r>
-              <a:rPr sz="1100" b="1" i="0">
+              <a:rPr sz="1050" b="1" i="0">
                 <a:solidFill>
                   <a:srgbClr val="0F111A"/>
                 </a:solidFill>
               </a:rPr>
-              <a:t>DoR scoring</a:t>
+              <a:t>Executive narrative</a:t>
             </a:r>
           </a:p>
         </p:txBody>
@@ -18918,28 +18918,28 @@
         </p:nvSpPr>
         <p:spPr>
           <a:xfrm>
-            <a:off x="1115568" y="4242816"/>
-            <a:ext cx="3749039" cy="274320"/>
-          </a:xfrm>
-          <a:prstGeom prst="rect">
-            <a:avLst/>
-          </a:prstGeom>
-          <a:noFill/>
-        </p:spPr>
-        <p:txBody>
-          <a:bodyPr wrap="square">
-            <a:spAutoFit/>
-          </a:bodyPr>
-          <a:lstStyle/>
-          <a:p>
-            <a:pPr algn="l"/>
-            <a:r>
-              <a:rPr sz="950" b="0" i="0">
+            <a:off x="1115568" y="3986784"/>
+            <a:ext cx="3749039" cy="310896"/>
+          </a:xfrm>
+          <a:prstGeom prst="rect">
+            <a:avLst/>
+          </a:prstGeom>
+          <a:noFill/>
+        </p:spPr>
+        <p:txBody>
+          <a:bodyPr wrap="square">
+            <a:spAutoFit/>
+          </a:bodyPr>
+          <a:lstStyle/>
+          <a:p>
+            <a:pPr algn="l"/>
+            <a:r>
+              <a:rPr sz="900" b="0" i="0">
                 <a:solidFill>
                   <a:srgbClr val="6B7396"/>
                 </a:solidFill>
               </a:rPr>
-              <a:t>9-criterion pass/fail scored per story</a:t>
+              <a:t>AI-written paragraph summary of classification stats</a:t>
             </a:r>
           </a:p>
         </p:txBody>
@@ -18952,7 +18952,7 @@
         </p:nvSpPr>
         <p:spPr>
           <a:xfrm>
-            <a:off x="5230368" y="4114800"/>
+            <a:off x="5230368" y="3895344"/>
             <a:ext cx="594360" cy="190500"/>
           </a:xfrm>
           <a:prstGeom prst="roundRect">
@@ -18999,7 +18999,7 @@
         </p:nvSpPr>
         <p:spPr>
           <a:xfrm>
-            <a:off x="5212080" y="4096512"/>
+            <a:off x="5212080" y="3877056"/>
             <a:ext cx="640080" cy="215900"/>
           </a:xfrm>
           <a:prstGeom prst="rect">
@@ -19033,8 +19033,8 @@
         </p:nvSpPr>
         <p:spPr>
           <a:xfrm>
-            <a:off x="502920" y="4663440"/>
-            <a:ext cx="5394960" cy="658368"/>
+            <a:off x="502920" y="4370832"/>
+            <a:ext cx="5394960" cy="640080"/>
           </a:xfrm>
           <a:prstGeom prst="roundRect">
             <a:avLst>
@@ -19080,7 +19080,7 @@
         </p:nvSpPr>
         <p:spPr>
           <a:xfrm>
-            <a:off x="658368" y="4754880"/>
+            <a:off x="658368" y="4462272"/>
             <a:ext cx="347472" cy="457200"/>
           </a:xfrm>
           <a:prstGeom prst="rect">
@@ -19101,7 +19101,7 @@
                   <a:srgbClr val="1E223A"/>
                 </a:solidFill>
               </a:rPr>
-              <a:t>💬</a:t>
+              <a:t>🎯</a:t>
             </a:r>
           </a:p>
         </p:txBody>
@@ -19114,7 +19114,7 @@
         </p:nvSpPr>
         <p:spPr>
           <a:xfrm>
-            <a:off x="1115568" y="4718304"/>
+            <a:off x="1115568" y="4407408"/>
             <a:ext cx="3566160" cy="256032"/>
           </a:xfrm>
           <a:prstGeom prst="rect">
@@ -19130,12 +19130,12 @@
           <a:p>
             <a:pPr algn="l"/>
             <a:r>
-              <a:rPr sz="1100" b="1" i="0">
+              <a:rPr sz="1050" b="1" i="0">
                 <a:solidFill>
                   <a:srgbClr val="0F111A"/>
                 </a:solidFill>
               </a:rPr>
-              <a:t>Story improvement chat</a:t>
+              <a:t>DoR scoring</a:t>
             </a:r>
           </a:p>
         </p:txBody>
@@ -19148,28 +19148,28 @@
         </p:nvSpPr>
         <p:spPr>
           <a:xfrm>
-            <a:off x="1115568" y="4992624"/>
-            <a:ext cx="3749039" cy="274320"/>
-          </a:xfrm>
-          <a:prstGeom prst="rect">
-            <a:avLst/>
-          </a:prstGeom>
-          <a:noFill/>
-        </p:spPr>
-        <p:txBody>
-          <a:bodyPr wrap="square">
-            <a:spAutoFit/>
-          </a:bodyPr>
-          <a:lstStyle/>
-          <a:p>
-            <a:pPr algn="l"/>
-            <a:r>
-              <a:rPr sz="950" b="0" i="0">
+            <a:off x="1115568" y="4663440"/>
+            <a:ext cx="3749039" cy="310896"/>
+          </a:xfrm>
+          <a:prstGeom prst="rect">
+            <a:avLst/>
+          </a:prstGeom>
+          <a:noFill/>
+        </p:spPr>
+        <p:txBody>
+          <a:bodyPr wrap="square">
+            <a:spAutoFit/>
+          </a:bodyPr>
+          <a:lstStyle/>
+          <a:p>
+            <a:pPr algn="l"/>
+            <a:r>
+              <a:rPr sz="900" b="0" i="0">
                 <a:solidFill>
                   <a:srgbClr val="6B7396"/>
                 </a:solidFill>
               </a:rPr>
-              <a:t>Targeted fix suggestions per failing criterion</a:t>
+              <a:t>9-criterion pass/fail scored per story</a:t>
             </a:r>
           </a:p>
         </p:txBody>
@@ -19182,7 +19182,7 @@
         </p:nvSpPr>
         <p:spPr>
           <a:xfrm>
-            <a:off x="5230368" y="4864608"/>
+            <a:off x="5230368" y="4572000"/>
             <a:ext cx="594360" cy="190500"/>
           </a:xfrm>
           <a:prstGeom prst="roundRect">
@@ -19229,7 +19229,7 @@
         </p:nvSpPr>
         <p:spPr>
           <a:xfrm>
-            <a:off x="5212080" y="4846320"/>
+            <a:off x="5212080" y="4553712"/>
             <a:ext cx="640080" cy="215900"/>
           </a:xfrm>
           <a:prstGeom prst="rect">
@@ -19263,8 +19263,8 @@
         </p:nvSpPr>
         <p:spPr>
           <a:xfrm>
-            <a:off x="502920" y="5413248"/>
-            <a:ext cx="5394960" cy="658368"/>
+            <a:off x="502920" y="5047488"/>
+            <a:ext cx="5394960" cy="640080"/>
           </a:xfrm>
           <a:prstGeom prst="roundRect">
             <a:avLst>
@@ -19310,7 +19310,7 @@
         </p:nvSpPr>
         <p:spPr>
           <a:xfrm>
-            <a:off x="658368" y="5504688"/>
+            <a:off x="658368" y="5138928"/>
             <a:ext cx="347472" cy="457200"/>
           </a:xfrm>
           <a:prstGeom prst="rect">
@@ -19331,7 +19331,7 @@
                   <a:srgbClr val="1E223A"/>
                 </a:solidFill>
               </a:rPr>
-              <a:t>✍️</a:t>
+              <a:t>💬</a:t>
             </a:r>
           </a:p>
         </p:txBody>
@@ -19344,7 +19344,7 @@
         </p:nvSpPr>
         <p:spPr>
           <a:xfrm>
-            <a:off x="1115568" y="5468112"/>
+            <a:off x="1115568" y="5084064"/>
             <a:ext cx="3566160" cy="256032"/>
           </a:xfrm>
           <a:prstGeom prst="rect">
@@ -19360,12 +19360,12 @@
           <a:p>
             <a:pPr algn="l"/>
             <a:r>
-              <a:rPr sz="1100" b="1" i="0">
+              <a:rPr sz="1050" b="1" i="0">
                 <a:solidFill>
                   <a:srgbClr val="0F111A"/>
                 </a:solidFill>
               </a:rPr>
-              <a:t>Story rewrite</a:t>
+              <a:t>Story improvement chat</a:t>
             </a:r>
           </a:p>
         </p:txBody>
@@ -19378,28 +19378,28 @@
         </p:nvSpPr>
         <p:spPr>
           <a:xfrm>
-            <a:off x="1115568" y="5742432"/>
-            <a:ext cx="3749039" cy="274320"/>
-          </a:xfrm>
-          <a:prstGeom prst="rect">
-            <a:avLst/>
-          </a:prstGeom>
-          <a:noFill/>
-        </p:spPr>
-        <p:txBody>
-          <a:bodyPr wrap="square">
-            <a:spAutoFit/>
-          </a:bodyPr>
-          <a:lstStyle/>
-          <a:p>
-            <a:pPr algn="l"/>
-            <a:r>
-              <a:rPr sz="950" b="0" i="0">
+            <a:off x="1115568" y="5340096"/>
+            <a:ext cx="3749039" cy="310896"/>
+          </a:xfrm>
+          <a:prstGeom prst="rect">
+            <a:avLst/>
+          </a:prstGeom>
+          <a:noFill/>
+        </p:spPr>
+        <p:txBody>
+          <a:bodyPr wrap="square">
+            <a:spAutoFit/>
+          </a:bodyPr>
+          <a:lstStyle/>
+          <a:p>
+            <a:pPr algn="l"/>
+            <a:r>
+              <a:rPr sz="900" b="0" i="0">
                 <a:solidFill>
                   <a:srgbClr val="6B7396"/>
                 </a:solidFill>
               </a:rPr>
-              <a:t>Full story rewrite addressing all failing criteria</a:t>
+              <a:t>Targeted fix suggestions per failing criterion</a:t>
             </a:r>
           </a:p>
         </p:txBody>
@@ -19412,7 +19412,7 @@
         </p:nvSpPr>
         <p:spPr>
           <a:xfrm>
-            <a:off x="5230368" y="5614416"/>
+            <a:off x="5230368" y="5248656"/>
             <a:ext cx="594360" cy="190500"/>
           </a:xfrm>
           <a:prstGeom prst="roundRect">
@@ -19459,7 +19459,7 @@
         </p:nvSpPr>
         <p:spPr>
           <a:xfrm>
-            <a:off x="5212080" y="5596128"/>
+            <a:off x="5212080" y="5230368"/>
             <a:ext cx="640080" cy="215900"/>
           </a:xfrm>
           <a:prstGeom prst="rect">
@@ -19487,7 +19487,237 @@
       </p:sp>
       <p:sp>
         <p:nvSpPr>
-          <p:cNvPr id="45" name="TextBox 44"/>
+          <p:cNvPr id="45" name="Rounded Rectangle 44"/>
+          <p:cNvSpPr/>
+          <p:nvPr/>
+        </p:nvSpPr>
+        <p:spPr>
+          <a:xfrm>
+            <a:off x="502920" y="5724144"/>
+            <a:ext cx="5394960" cy="640080"/>
+          </a:xfrm>
+          <a:prstGeom prst="roundRect">
+            <a:avLst>
+              <a:gd name="adj" fmla="val 4000"/>
+            </a:avLst>
+          </a:prstGeom>
+          <a:solidFill>
+            <a:srgbClr val="FFFFFF"/>
+          </a:solidFill>
+          <a:ln w="9525">
+            <a:solidFill>
+              <a:srgbClr val="D8DCEE"/>
+            </a:solidFill>
+          </a:ln>
+        </p:spPr>
+        <p:style>
+          <a:lnRef idx="1">
+            <a:schemeClr val="accent1"/>
+          </a:lnRef>
+          <a:fillRef idx="3">
+            <a:schemeClr val="accent1"/>
+          </a:fillRef>
+          <a:effectRef idx="2">
+            <a:schemeClr val="accent1"/>
+          </a:effectRef>
+          <a:fontRef idx="minor">
+            <a:schemeClr val="lt1"/>
+          </a:fontRef>
+        </p:style>
+        <p:txBody>
+          <a:bodyPr rtlCol="0" anchor="ctr"/>
+          <a:lstStyle/>
+          <a:p>
+            <a:pPr algn="ctr"/>
+          </a:p>
+        </p:txBody>
+      </p:sp>
+      <p:sp>
+        <p:nvSpPr>
+          <p:cNvPr id="46" name="TextBox 45"/>
+          <p:cNvSpPr txBox="1"/>
+          <p:nvPr/>
+        </p:nvSpPr>
+        <p:spPr>
+          <a:xfrm>
+            <a:off x="658368" y="5815584"/>
+            <a:ext cx="347472" cy="457200"/>
+          </a:xfrm>
+          <a:prstGeom prst="rect">
+            <a:avLst/>
+          </a:prstGeom>
+          <a:noFill/>
+        </p:spPr>
+        <p:txBody>
+          <a:bodyPr wrap="square">
+            <a:spAutoFit/>
+          </a:bodyPr>
+          <a:lstStyle/>
+          <a:p>
+            <a:pPr algn="l"/>
+            <a:r>
+              <a:rPr sz="1400" b="0" i="0">
+                <a:solidFill>
+                  <a:srgbClr val="1E223A"/>
+                </a:solidFill>
+              </a:rPr>
+              <a:t>✍️</a:t>
+            </a:r>
+          </a:p>
+        </p:txBody>
+      </p:sp>
+      <p:sp>
+        <p:nvSpPr>
+          <p:cNvPr id="47" name="TextBox 46"/>
+          <p:cNvSpPr txBox="1"/>
+          <p:nvPr/>
+        </p:nvSpPr>
+        <p:spPr>
+          <a:xfrm>
+            <a:off x="1115568" y="5760720"/>
+            <a:ext cx="3566160" cy="256032"/>
+          </a:xfrm>
+          <a:prstGeom prst="rect">
+            <a:avLst/>
+          </a:prstGeom>
+          <a:noFill/>
+        </p:spPr>
+        <p:txBody>
+          <a:bodyPr wrap="square">
+            <a:spAutoFit/>
+          </a:bodyPr>
+          <a:lstStyle/>
+          <a:p>
+            <a:pPr algn="l"/>
+            <a:r>
+              <a:rPr sz="1050" b="1" i="0">
+                <a:solidFill>
+                  <a:srgbClr val="0F111A"/>
+                </a:solidFill>
+              </a:rPr>
+              <a:t>Story rewrite</a:t>
+            </a:r>
+          </a:p>
+        </p:txBody>
+      </p:sp>
+      <p:sp>
+        <p:nvSpPr>
+          <p:cNvPr id="48" name="TextBox 47"/>
+          <p:cNvSpPr txBox="1"/>
+          <p:nvPr/>
+        </p:nvSpPr>
+        <p:spPr>
+          <a:xfrm>
+            <a:off x="1115568" y="6016752"/>
+            <a:ext cx="3749039" cy="310896"/>
+          </a:xfrm>
+          <a:prstGeom prst="rect">
+            <a:avLst/>
+          </a:prstGeom>
+          <a:noFill/>
+        </p:spPr>
+        <p:txBody>
+          <a:bodyPr wrap="square">
+            <a:spAutoFit/>
+          </a:bodyPr>
+          <a:lstStyle/>
+          <a:p>
+            <a:pPr algn="l"/>
+            <a:r>
+              <a:rPr sz="900" b="0" i="0">
+                <a:solidFill>
+                  <a:srgbClr val="6B7396"/>
+                </a:solidFill>
+              </a:rPr>
+              <a:t>Full story rewrite addressing all failing criteria</a:t>
+            </a:r>
+          </a:p>
+        </p:txBody>
+      </p:sp>
+      <p:sp>
+        <p:nvSpPr>
+          <p:cNvPr id="49" name="Rounded Rectangle 48"/>
+          <p:cNvSpPr/>
+          <p:nvPr/>
+        </p:nvSpPr>
+        <p:spPr>
+          <a:xfrm>
+            <a:off x="5230368" y="5925312"/>
+            <a:ext cx="594360" cy="190500"/>
+          </a:xfrm>
+          <a:prstGeom prst="roundRect">
+            <a:avLst>
+              <a:gd name="adj" fmla="val 4000"/>
+            </a:avLst>
+          </a:prstGeom>
+          <a:solidFill>
+            <a:srgbClr val="EDEBFF"/>
+          </a:solidFill>
+          <a:ln w="9525">
+            <a:solidFill>
+              <a:srgbClr val="EDEBFF"/>
+            </a:solidFill>
+          </a:ln>
+        </p:spPr>
+        <p:style>
+          <a:lnRef idx="1">
+            <a:schemeClr val="accent1"/>
+          </a:lnRef>
+          <a:fillRef idx="3">
+            <a:schemeClr val="accent1"/>
+          </a:fillRef>
+          <a:effectRef idx="2">
+            <a:schemeClr val="accent1"/>
+          </a:effectRef>
+          <a:fontRef idx="minor">
+            <a:schemeClr val="lt1"/>
+          </a:fontRef>
+        </p:style>
+        <p:txBody>
+          <a:bodyPr rtlCol="0" anchor="ctr"/>
+          <a:lstStyle/>
+          <a:p>
+            <a:pPr algn="ctr"/>
+          </a:p>
+        </p:txBody>
+      </p:sp>
+      <p:sp>
+        <p:nvSpPr>
+          <p:cNvPr id="50" name="TextBox 49"/>
+          <p:cNvSpPr txBox="1"/>
+          <p:nvPr/>
+        </p:nvSpPr>
+        <p:spPr>
+          <a:xfrm>
+            <a:off x="5212080" y="5907024"/>
+            <a:ext cx="640080" cy="215900"/>
+          </a:xfrm>
+          <a:prstGeom prst="rect">
+            <a:avLst/>
+          </a:prstGeom>
+          <a:noFill/>
+        </p:spPr>
+        <p:txBody>
+          <a:bodyPr wrap="square">
+            <a:spAutoFit/>
+          </a:bodyPr>
+          <a:lstStyle/>
+          <a:p>
+            <a:pPr algn="ctr"/>
+            <a:r>
+              <a:rPr sz="750" b="1" i="0">
+                <a:solidFill>
+                  <a:srgbClr val="4A40CC"/>
+                </a:solidFill>
+              </a:rPr>
+              <a:t>🤖 LLM</a:t>
+            </a:r>
+          </a:p>
+        </p:txBody>
+      </p:sp>
+      <p:sp>
+        <p:nvSpPr>
+          <p:cNvPr id="51" name="TextBox 50"/>
           <p:cNvSpPr txBox="1"/>
           <p:nvPr/>
         </p:nvSpPr>
@@ -19521,7 +19751,7 @@
       </p:sp>
       <p:sp>
         <p:nvSpPr>
-          <p:cNvPr id="46" name="TextBox 45"/>
+          <p:cNvPr id="52" name="TextBox 51"/>
           <p:cNvSpPr txBox="1"/>
           <p:nvPr/>
         </p:nvSpPr>
@@ -19555,7 +19785,7 @@
       </p:sp>
       <p:sp>
         <p:nvSpPr>
-          <p:cNvPr id="47" name="Rounded Rectangle 46"/>
+          <p:cNvPr id="53" name="Rounded Rectangle 52"/>
           <p:cNvSpPr/>
           <p:nvPr/>
         </p:nvSpPr>
@@ -19602,14 +19832,14 @@
       </p:sp>
       <p:sp>
         <p:nvSpPr>
-          <p:cNvPr id="48" name="Rounded Rectangle 47"/>
+          <p:cNvPr id="54" name="Rounded Rectangle 53"/>
           <p:cNvSpPr/>
           <p:nvPr/>
         </p:nvSpPr>
         <p:spPr>
           <a:xfrm>
             <a:off x="8065008" y="1737360"/>
-            <a:ext cx="2978331" cy="182880"/>
+            <a:ext cx="1489165" cy="182880"/>
           </a:xfrm>
           <a:prstGeom prst="roundRect">
             <a:avLst>
@@ -19647,7 +19877,7 @@
       </p:sp>
       <p:sp>
         <p:nvSpPr>
-          <p:cNvPr id="49" name="TextBox 48"/>
+          <p:cNvPr id="55" name="TextBox 54"/>
           <p:cNvSpPr txBox="1"/>
           <p:nvPr/>
         </p:nvSpPr>
@@ -19674,14 +19904,14 @@
                   <a:srgbClr val="5B52E8"/>
                 </a:solidFill>
               </a:rPr>
-              <a:t>6/7</a:t>
-            </a:r>
-          </a:p>
-        </p:txBody>
-      </p:sp>
-      <p:sp>
-        <p:nvSpPr>
-          <p:cNvPr id="50" name="TextBox 49"/>
+              <a:t>3/7</a:t>
+            </a:r>
+          </a:p>
+        </p:txBody>
+      </p:sp>
+      <p:sp>
+        <p:nvSpPr>
+          <p:cNvPr id="56" name="TextBox 55"/>
           <p:cNvSpPr txBox="1"/>
           <p:nvPr/>
         </p:nvSpPr>
@@ -19715,7 +19945,7 @@
       </p:sp>
       <p:sp>
         <p:nvSpPr>
-          <p:cNvPr id="51" name="Rounded Rectangle 50"/>
+          <p:cNvPr id="57" name="Rounded Rectangle 56"/>
           <p:cNvSpPr/>
           <p:nvPr/>
         </p:nvSpPr>
@@ -19762,7 +19992,7 @@
       </p:sp>
       <p:sp>
         <p:nvSpPr>
-          <p:cNvPr id="52" name="Rounded Rectangle 51"/>
+          <p:cNvPr id="58" name="Rounded Rectangle 57"/>
           <p:cNvSpPr/>
           <p:nvPr/>
         </p:nvSpPr>
@@ -19807,7 +20037,7 @@
       </p:sp>
       <p:sp>
         <p:nvSpPr>
-          <p:cNvPr id="53" name="TextBox 52"/>
+          <p:cNvPr id="59" name="TextBox 58"/>
           <p:cNvSpPr txBox="1"/>
           <p:nvPr/>
         </p:nvSpPr>
@@ -19841,7 +20071,7 @@
       </p:sp>
       <p:sp>
         <p:nvSpPr>
-          <p:cNvPr id="54" name="TextBox 53"/>
+          <p:cNvPr id="60" name="TextBox 59"/>
           <p:cNvSpPr txBox="1"/>
           <p:nvPr/>
         </p:nvSpPr>
@@ -19875,7 +20105,7 @@
       </p:sp>
       <p:sp>
         <p:nvSpPr>
-          <p:cNvPr id="55" name="Rounded Rectangle 54"/>
+          <p:cNvPr id="61" name="Rounded Rectangle 60"/>
           <p:cNvSpPr/>
           <p:nvPr/>
         </p:nvSpPr>
@@ -19922,7 +20152,7 @@
       </p:sp>
       <p:sp>
         <p:nvSpPr>
-          <p:cNvPr id="56" name="TextBox 55"/>
+          <p:cNvPr id="62" name="TextBox 61"/>
           <p:cNvSpPr txBox="1"/>
           <p:nvPr/>
         </p:nvSpPr>
@@ -19956,7 +20186,7 @@
       </p:sp>
       <p:sp>
         <p:nvSpPr>
-          <p:cNvPr id="57" name="TextBox 56"/>
+          <p:cNvPr id="63" name="TextBox 62"/>
           <p:cNvSpPr txBox="1"/>
           <p:nvPr/>
         </p:nvSpPr>
@@ -19990,7 +20220,7 @@
       </p:sp>
       <p:sp>
         <p:nvSpPr>
-          <p:cNvPr id="58" name="Rounded Rectangle 57"/>
+          <p:cNvPr id="64" name="Rounded Rectangle 63"/>
           <p:cNvSpPr/>
           <p:nvPr/>
         </p:nvSpPr>
@@ -20037,7 +20267,7 @@
       </p:sp>
       <p:sp>
         <p:nvSpPr>
-          <p:cNvPr id="59" name="TextBox 58"/>
+          <p:cNvPr id="65" name="TextBox 64"/>
           <p:cNvSpPr txBox="1"/>
           <p:nvPr/>
         </p:nvSpPr>
@@ -20071,7 +20301,7 @@
       </p:sp>
       <p:sp>
         <p:nvSpPr>
-          <p:cNvPr id="60" name="TextBox 59"/>
+          <p:cNvPr id="66" name="TextBox 65"/>
           <p:cNvSpPr txBox="1"/>
           <p:nvPr/>
         </p:nvSpPr>
@@ -20105,7 +20335,7 @@
       </p:sp>
       <p:sp>
         <p:nvSpPr>
-          <p:cNvPr id="61" name="Rounded Rectangle 60"/>
+          <p:cNvPr id="67" name="Rounded Rectangle 66"/>
           <p:cNvSpPr/>
           <p:nvPr/>
         </p:nvSpPr>
@@ -20152,7 +20382,7 @@
       </p:sp>
       <p:sp>
         <p:nvSpPr>
-          <p:cNvPr id="62" name="Rounded Rectangle 61"/>
+          <p:cNvPr id="68" name="Rounded Rectangle 67"/>
           <p:cNvSpPr/>
           <p:nvPr/>
         </p:nvSpPr>
@@ -20197,7 +20427,7 @@
       </p:sp>
       <p:sp>
         <p:nvSpPr>
-          <p:cNvPr id="63" name="TextBox 62"/>
+          <p:cNvPr id="69" name="TextBox 68"/>
           <p:cNvSpPr txBox="1"/>
           <p:nvPr/>
         </p:nvSpPr>
@@ -20231,7 +20461,7 @@
       </p:sp>
       <p:sp>
         <p:nvSpPr>
-          <p:cNvPr id="64" name="TextBox 63"/>
+          <p:cNvPr id="70" name="TextBox 69"/>
           <p:cNvSpPr txBox="1"/>
           <p:nvPr/>
         </p:nvSpPr>
@@ -20265,7 +20495,7 @@
       </p:sp>
       <p:sp>
         <p:nvSpPr>
-          <p:cNvPr id="65" name="Rounded Rectangle 64"/>
+          <p:cNvPr id="71" name="Rounded Rectangle 70"/>
           <p:cNvSpPr/>
           <p:nvPr/>
         </p:nvSpPr>
@@ -20312,7 +20542,7 @@
       </p:sp>
       <p:sp>
         <p:nvSpPr>
-          <p:cNvPr id="66" name="TextBox 65"/>
+          <p:cNvPr id="72" name="TextBox 71"/>
           <p:cNvSpPr txBox="1"/>
           <p:nvPr/>
         </p:nvSpPr>
@@ -20346,7 +20576,7 @@
       </p:sp>
       <p:sp>
         <p:nvSpPr>
-          <p:cNvPr id="67" name="TextBox 66"/>
+          <p:cNvPr id="73" name="TextBox 72"/>
           <p:cNvSpPr txBox="1"/>
           <p:nvPr/>
         </p:nvSpPr>
@@ -20380,7 +20610,7 @@
       </p:sp>
       <p:sp>
         <p:nvSpPr>
-          <p:cNvPr id="68" name="Rounded Rectangle 67"/>
+          <p:cNvPr id="74" name="Rounded Rectangle 73"/>
           <p:cNvSpPr/>
           <p:nvPr/>
         </p:nvSpPr>
@@ -20427,7 +20657,7 @@
       </p:sp>
       <p:sp>
         <p:nvSpPr>
-          <p:cNvPr id="69" name="TextBox 68"/>
+          <p:cNvPr id="75" name="TextBox 74"/>
           <p:cNvSpPr txBox="1"/>
           <p:nvPr/>
         </p:nvSpPr>
@@ -20461,7 +20691,7 @@
       </p:sp>
       <p:sp>
         <p:nvSpPr>
-          <p:cNvPr id="70" name="TextBox 69"/>
+          <p:cNvPr id="76" name="TextBox 75"/>
           <p:cNvSpPr txBox="1"/>
           <p:nvPr/>
         </p:nvSpPr>
@@ -20495,7 +20725,7 @@
       </p:sp>
       <p:sp>
         <p:nvSpPr>
-          <p:cNvPr id="71" name="Rounded Rectangle 70"/>
+          <p:cNvPr id="77" name="Rounded Rectangle 76"/>
           <p:cNvSpPr/>
           <p:nvPr/>
         </p:nvSpPr>
@@ -20542,7 +20772,7 @@
       </p:sp>
       <p:sp>
         <p:nvSpPr>
-          <p:cNvPr id="72" name="TextBox 71"/>
+          <p:cNvPr id="78" name="TextBox 77"/>
           <p:cNvSpPr txBox="1"/>
           <p:nvPr/>
         </p:nvSpPr>
@@ -20576,7 +20806,7 @@
       </p:sp>
       <p:sp>
         <p:nvSpPr>
-          <p:cNvPr id="73" name="Rounded Rectangle 72"/>
+          <p:cNvPr id="79" name="Rounded Rectangle 78"/>
           <p:cNvSpPr/>
           <p:nvPr/>
         </p:nvSpPr>
@@ -20623,7 +20853,7 @@
       </p:sp>
       <p:sp>
         <p:nvSpPr>
-          <p:cNvPr id="74" name="TextBox 73"/>
+          <p:cNvPr id="80" name="TextBox 79"/>
           <p:cNvSpPr txBox="1"/>
           <p:nvPr/>
         </p:nvSpPr>
@@ -20657,7 +20887,7 @@
       </p:sp>
       <p:sp>
         <p:nvSpPr>
-          <p:cNvPr id="75" name="Rounded Rectangle 74"/>
+          <p:cNvPr id="81" name="Rounded Rectangle 80"/>
           <p:cNvSpPr/>
           <p:nvPr/>
         </p:nvSpPr>
@@ -20704,7 +20934,7 @@
       </p:sp>
       <p:sp>
         <p:nvSpPr>
-          <p:cNvPr id="76" name="TextBox 75"/>
+          <p:cNvPr id="82" name="TextBox 81"/>
           <p:cNvSpPr txBox="1"/>
           <p:nvPr/>
         </p:nvSpPr>
@@ -20738,7 +20968,7 @@
       </p:sp>
       <p:sp>
         <p:nvSpPr>
-          <p:cNvPr id="77" name="Rounded Rectangle 76"/>
+          <p:cNvPr id="83" name="Rounded Rectangle 82"/>
           <p:cNvSpPr/>
           <p:nvPr/>
         </p:nvSpPr>
@@ -20785,7 +21015,7 @@
       </p:sp>
       <p:sp>
         <p:nvSpPr>
-          <p:cNvPr id="78" name="TextBox 77"/>
+          <p:cNvPr id="84" name="TextBox 83"/>
           <p:cNvSpPr txBox="1"/>
           <p:nvPr/>
         </p:nvSpPr>
@@ -20819,7 +21049,7 @@
       </p:sp>
       <p:sp>
         <p:nvSpPr>
-          <p:cNvPr id="79" name="Rounded Rectangle 78"/>
+          <p:cNvPr id="85" name="Rounded Rectangle 84"/>
           <p:cNvSpPr/>
           <p:nvPr/>
         </p:nvSpPr>
@@ -20866,7 +21096,7 @@
       </p:sp>
       <p:sp>
         <p:nvSpPr>
-          <p:cNvPr id="80" name="TextBox 79"/>
+          <p:cNvPr id="86" name="TextBox 85"/>
           <p:cNvSpPr txBox="1"/>
           <p:nvPr/>
         </p:nvSpPr>
@@ -20900,7 +21130,7 @@
       </p:sp>
       <p:sp>
         <p:nvSpPr>
-          <p:cNvPr id="81" name="Rounded Rectangle 80"/>
+          <p:cNvPr id="87" name="Rounded Rectangle 86"/>
           <p:cNvSpPr/>
           <p:nvPr/>
         </p:nvSpPr>
@@ -20947,7 +21177,7 @@
       </p:sp>
       <p:sp>
         <p:nvSpPr>
-          <p:cNvPr id="82" name="TextBox 81"/>
+          <p:cNvPr id="88" name="TextBox 87"/>
           <p:cNvSpPr txBox="1"/>
           <p:nvPr/>
         </p:nvSpPr>
@@ -20981,7 +21211,7 @@
       </p:sp>
       <p:sp>
         <p:nvSpPr>
-          <p:cNvPr id="83" name="Rectangle 82"/>
+          <p:cNvPr id="89" name="Rectangle 88"/>
           <p:cNvSpPr/>
           <p:nvPr/>
         </p:nvSpPr>
@@ -21026,7 +21256,7 @@
       </p:sp>
       <p:sp>
         <p:nvSpPr>
-          <p:cNvPr id="84" name="Rectangle 83"/>
+          <p:cNvPr id="90" name="Rectangle 89"/>
           <p:cNvSpPr/>
           <p:nvPr/>
         </p:nvSpPr>
@@ -21069,7 +21299,7 @@
       </p:sp>
       <p:sp>
         <p:nvSpPr>
-          <p:cNvPr id="85" name="TextBox 84"/>
+          <p:cNvPr id="91" name="TextBox 90"/>
           <p:cNvSpPr txBox="1"/>
           <p:nvPr/>
         </p:nvSpPr>
@@ -21103,7 +21333,7 @@
       </p:sp>
       <p:sp>
         <p:nvSpPr>
-          <p:cNvPr id="86" name="TextBox 85"/>
+          <p:cNvPr id="92" name="TextBox 91"/>
           <p:cNvSpPr txBox="1"/>
           <p:nvPr/>
         </p:nvSpPr>

--- a/static/WAF_Classifier_Capabilities.pptx
+++ b/static/WAF_Classifier_Capabilities.pptx
@@ -11958,7 +11958,7 @@
                   <a:srgbClr val="0F111A"/>
                 </a:solidFill>
               </a:rPr>
-              <a:t>We deliver thousands of stories every quarter.</a:t>
+              <a:t>Misclassification sends human capital to the wrong priorities.</a:t>
             </a:r>
           </a:p>
         </p:txBody>
@@ -11972,7 +11972,7 @@
         <p:spPr>
           <a:xfrm>
             <a:off x="502920" y="969264"/>
-            <a:ext cx="10515600" cy="457200"/>
+            <a:ext cx="10789920" cy="457200"/>
           </a:xfrm>
           <a:prstGeom prst="rect">
             <a:avLst/>
@@ -11992,7 +11992,7 @@
                   <a:srgbClr val="6B7396"/>
                 </a:solidFill>
               </a:rPr>
-              <a:t>But can we honestly say they're all aligned, accurately tracked, and tied to what matters most for the organisation?</a:t>
+              <a:t>And we don't see the drift until quarter-end — when the PI is already over. Misalignment must surface in-PI, while leadership can still redirect effort.</a:t>
             </a:r>
           </a:p>
         </p:txBody>
@@ -12116,7 +12116,7 @@
                   <a:srgbClr val="DC2626"/>
                 </a:solidFill>
               </a:rPr>
-              <a:t>❝  Are we working on the right things?  Are we aligned?  Are we focused on initiatives that drive real value?  ❞</a:t>
+              <a:t>❝  Every misclassified story is engineering capacity flowing to the wrong priority — and today, we don't catch it until it's too late to fix.  ❞</a:t>
             </a:r>
           </a:p>
         </p:txBody>
@@ -12274,7 +12274,7 @@
                   <a:srgbClr val="0F111A"/>
                 </a:solidFill>
               </a:rPr>
-              <a:t>Inconsistent classification</a:t>
+              <a:t>Misclassification at the source</a:t>
             </a:r>
           </a:p>
         </p:txBody>
@@ -12308,7 +12308,7 @@
                   <a:srgbClr val="6B7396"/>
                 </a:solidFill>
               </a:rPr>
-              <a:t>Hundreds of teams tag stories against the WAF independently. Without a shared baseline, the same story gets classified differently depending on who's doing the tagging.</a:t>
+              <a:t>Hundreds of teams tag stories independently. Without a shared baseline, the same kind of work lands in different WAF buckets across teams — distorting the picture from day one.</a:t>
             </a:r>
           </a:p>
         </p:txBody>
@@ -12432,7 +12432,7 @@
                   <a:srgbClr val="1E223A"/>
                 </a:solidFill>
               </a:rPr>
-              <a:t>⏱</a:t>
+              <a:t>⚖️</a:t>
             </a:r>
           </a:p>
         </p:txBody>
@@ -12466,7 +12466,7 @@
                   <a:srgbClr val="0F111A"/>
                 </a:solidFill>
               </a:rPr>
-              <a:t>Doesn't scale manually</a:t>
+              <a:t>Capital flows to the wrong priorities</a:t>
             </a:r>
           </a:p>
         </p:txBody>
@@ -12500,7 +12500,7 @@
                   <a:srgbClr val="6B7396"/>
                 </a:solidFill>
               </a:rPr>
-              <a:t>Reviewing and tagging thousands of stories per PI is slow, tedious, and error-prone. Central teams become a bottleneck. Deadlines get missed.</a:t>
+              <a:t>When tags are wrong, effort meant for strategic colours shows up as Run — or vice versa. Real allocation drifts from intent without anyone noticing.</a:t>
             </a:r>
           </a:p>
         </p:txBody>
@@ -12624,7 +12624,7 @@
                   <a:srgbClr val="1E223A"/>
                 </a:solidFill>
               </a:rPr>
-              <a:t>📋</a:t>
+              <a:t>⏱</a:t>
             </a:r>
           </a:p>
         </p:txBody>
@@ -12658,7 +12658,7 @@
                   <a:srgbClr val="0F111A"/>
                 </a:solidFill>
               </a:rPr>
-              <a:t>Poor story quality</a:t>
+              <a:t>Drift is invisible until quarter-end</a:t>
             </a:r>
           </a:p>
         </p:txBody>
@@ -12692,7 +12692,7 @@
                   <a:srgbClr val="6B7396"/>
                 </a:solidFill>
               </a:rPr>
-              <a:t>Stories missing acceptance criteria, source data, or clear outcomes can't be reliably classified — or delivered. Quality problems cascade.</a:t>
+              <a:t>By the time portfolio reports surface the misalignment, the PI is over. Leadership ends up reacting to last quarter's problem, not this one.</a:t>
             </a:r>
           </a:p>
         </p:txBody>
@@ -12816,7 +12816,7 @@
                   <a:srgbClr val="1E223A"/>
                 </a:solidFill>
               </a:rPr>
-              <a:t>🔍</a:t>
+              <a:t>🎯</a:t>
             </a:r>
           </a:p>
         </p:txBody>
@@ -12850,7 +12850,7 @@
                   <a:srgbClr val="0F111A"/>
                 </a:solidFill>
               </a:rPr>
-              <a:t>No audit trail</a:t>
+              <a:t>No in-PI course-correction lever</a:t>
             </a:r>
           </a:p>
         </p:txBody>
@@ -12884,7 +12884,7 @@
                   <a:srgbClr val="6B7396"/>
                 </a:solidFill>
               </a:rPr>
-              <a:t>When a classification is challenged — 'why is this tagged ORANGE?' — there's no record of the reasoning, who tagged it, or what version of the WAF was active.</a:t>
+              <a:t>Even when drift is suspected, there's no fast way to surface mismatched stories — no mechanism to redirect effort while the PI is still live.</a:t>
             </a:r>
           </a:p>
         </p:txBody>
@@ -13008,7 +13008,7 @@
                   <a:srgbClr val="1E223A"/>
                 </a:solidFill>
               </a:rPr>
-              <a:t>📊</a:t>
+              <a:t>🔍</a:t>
             </a:r>
           </a:p>
         </p:txBody>
@@ -13042,7 +13042,7 @@
                   <a:srgbClr val="0F111A"/>
                 </a:solidFill>
               </a:rPr>
-              <a:t>Leadership can't trust the data</a:t>
+              <a:t>No audit trail when tags are challenged</a:t>
             </a:r>
           </a:p>
         </p:txBody>
@@ -13076,7 +13076,7 @@
                   <a:srgbClr val="6B7396"/>
                 </a:solidFill>
               </a:rPr>
-              <a:t>If the Run vs. Change split or strategic category breakdown is based on inconsistent manual tagging, the numbers reported to senior leadership are unreliable.</a:t>
+              <a:t>When a classification is disputed — 'why is this tagged ORANGE?' — there's no record of who tagged it, the reasoning, or which WAF version was active.</a:t>
             </a:r>
           </a:p>
         </p:txBody>
@@ -13200,7 +13200,7 @@
                   <a:srgbClr val="1E223A"/>
                 </a:solidFill>
               </a:rPr>
-              <a:t>🎯</a:t>
+              <a:t>📊</a:t>
             </a:r>
           </a:p>
         </p:txBody>
@@ -13234,7 +13234,7 @@
                   <a:srgbClr val="0F111A"/>
                 </a:solidFill>
               </a:rPr>
-              <a:t>Misalignment goes undetected</a:t>
+              <a:t>Manual review doesn't scale</a:t>
             </a:r>
           </a:p>
         </p:txBody>
@@ -13268,7 +13268,7 @@
                   <a:srgbClr val="6B7396"/>
                 </a:solidFill>
               </a:rPr>
-              <a:t>Without visibility across teams and epics, work that drifts away from strategic priorities — SPEED, tech modernisation, customer value — goes unnoticed until it's too late.</a:t>
+              <a:t>Thousands of stories per PI, hundreds of teams. Central QA becomes the bottleneck — and gets skipped when deadlines hit.</a:t>
             </a:r>
           </a:p>
         </p:txBody>
@@ -15596,7 +15596,7 @@
                   <a:srgbClr val="0F111A"/>
                 </a:solidFill>
               </a:rPr>
-              <a:t>What Leadership Gets</a:t>
+              <a:t>What Leadership Gets — Course-Correct In-PI</a:t>
             </a:r>
           </a:p>
         </p:txBody>
@@ -15630,7 +15630,7 @@
                   <a:srgbClr val="6B7396"/>
                 </a:solidFill>
               </a:rPr>
-              <a:t>The decisions and visibility this platform enables — without dictating the work that produces them.</a:t>
+              <a:t>Surface misalignment in days, not quarters — so engineering capacity gets redirected while the PI is still live.</a:t>
             </a:r>
           </a:p>
         </p:txBody>
@@ -17661,7 +17661,7 @@
                   <a:srgbClr val="6B7396"/>
                 </a:solidFill>
               </a:rPr>
-              <a:t>WAF Classifier  ·  Built to bring consistency, auditability, and quality to every work item.</a:t>
+              <a:t>WAF Classifier  ·  Built to ensure engineering capacity flows to the right priorities — and surface drift fast enough to fix it.</a:t>
             </a:r>
           </a:p>
         </p:txBody>

--- a/static/WAF_Classifier_Capabilities.pptx
+++ b/static/WAF_Classifier_Capabilities.pptx
@@ -18,6 +18,7 @@
     <p:sldId id="266" r:id="rId17"/>
     <p:sldId id="267" r:id="rId18"/>
     <p:sldId id="268" r:id="rId19"/>
+    <p:sldId id="269" r:id="rId20"/>
   </p:sldIdLst>
   <p:sldSz cx="12188952" cy="6858000" type="screen4x3"/>
   <p:notesSz cx="6858000" cy="9144000"/>
@@ -11787,6 +11788,435 @@
                 </a:solidFill>
               </a:rPr>
               <a:t>13 / 13</a:t>
+            </a:r>
+          </a:p>
+        </p:txBody>
+      </p:sp>
+    </p:spTree>
+  </p:cSld>
+  <p:clrMapOvr>
+    <a:masterClrMapping/>
+  </p:clrMapOvr>
+</p:sld>
+</file>
+
+<file path=ppt/slides/slide14.xml><?xml version="1.0" encoding="utf-8"?>
+<p:sld xmlns:a="http://schemas.openxmlformats.org/drawingml/2006/main" xmlns:p="http://schemas.openxmlformats.org/presentationml/2006/main" xmlns:r="http://schemas.openxmlformats.org/officeDocument/2006/relationships">
+  <p:cSld>
+    <p:spTree>
+      <p:nvGrpSpPr>
+        <p:cNvPr id="1" name=""/>
+        <p:cNvGrpSpPr/>
+        <p:nvPr/>
+      </p:nvGrpSpPr>
+      <p:grpSpPr/>
+      <p:sp>
+        <p:nvSpPr>
+          <p:cNvPr id="2" name="TextBox 1"/>
+          <p:cNvSpPr txBox="1"/>
+          <p:nvPr/>
+        </p:nvSpPr>
+        <p:spPr>
+          <a:xfrm>
+            <a:off x="548640" y="411480"/>
+            <a:ext cx="5486400" cy="365760"/>
+          </a:xfrm>
+          <a:prstGeom prst="rect">
+            <a:avLst/>
+          </a:prstGeom>
+          <a:noFill/>
+        </p:spPr>
+        <p:txBody>
+          <a:bodyPr wrap="square">
+            <a:spAutoFit/>
+          </a:bodyPr>
+          <a:lstStyle/>
+          <a:p>
+            <a:r>
+              <a:rPr sz="1100" b="1">
+                <a:solidFill>
+                  <a:srgbClr val="A0A0A0"/>
+                </a:solidFill>
+              </a:rPr>
+              <a:t>WHAT'S NEW</a:t>
+            </a:r>
+          </a:p>
+        </p:txBody>
+      </p:sp>
+      <p:sp>
+        <p:nvSpPr>
+          <p:cNvPr id="3" name="TextBox 2"/>
+          <p:cNvSpPr txBox="1"/>
+          <p:nvPr/>
+        </p:nvSpPr>
+        <p:spPr>
+          <a:xfrm>
+            <a:off x="548640" y="777240"/>
+            <a:ext cx="10972800" cy="822960"/>
+          </a:xfrm>
+          <a:prstGeom prst="rect">
+            <a:avLst/>
+          </a:prstGeom>
+          <a:noFill/>
+        </p:spPr>
+        <p:txBody>
+          <a:bodyPr wrap="square">
+            <a:spAutoFit/>
+          </a:bodyPr>
+          <a:lstStyle/>
+          <a:p>
+            <a:r>
+              <a:rPr sz="3400" b="1">
+                <a:solidFill>
+                  <a:srgbClr val="1F2A3C"/>
+                </a:solidFill>
+              </a:rPr>
+              <a:t>v3.7 — May 2026</a:t>
+            </a:r>
+          </a:p>
+        </p:txBody>
+      </p:sp>
+      <p:sp>
+        <p:nvSpPr>
+          <p:cNvPr id="4" name="TextBox 3"/>
+          <p:cNvSpPr txBox="1"/>
+          <p:nvPr/>
+        </p:nvSpPr>
+        <p:spPr>
+          <a:xfrm>
+            <a:off x="548640" y="1554480"/>
+            <a:ext cx="10972800" cy="457200"/>
+          </a:xfrm>
+          <a:prstGeom prst="rect">
+            <a:avLst/>
+          </a:prstGeom>
+          <a:noFill/>
+        </p:spPr>
+        <p:txBody>
+          <a:bodyPr wrap="square">
+            <a:spAutoFit/>
+          </a:bodyPr>
+          <a:lstStyle/>
+          <a:p>
+            <a:r>
+              <a:rPr sz="1400" b="0">
+                <a:solidFill>
+                  <a:srgbClr val="556075"/>
+                </a:solidFill>
+              </a:rPr>
+              <a:t>Composite rubrics, in-app domain authoring, broader dispute coverage, and aggregate observability.</a:t>
+            </a:r>
+          </a:p>
+        </p:txBody>
+      </p:sp>
+      <p:sp>
+        <p:nvSpPr>
+          <p:cNvPr id="5" name="TextBox 4"/>
+          <p:cNvSpPr txBox="1"/>
+          <p:nvPr/>
+        </p:nvSpPr>
+        <p:spPr>
+          <a:xfrm>
+            <a:off x="548640" y="2286000"/>
+            <a:ext cx="5303520" cy="4114800"/>
+          </a:xfrm>
+          <a:prstGeom prst="rect">
+            <a:avLst/>
+          </a:prstGeom>
+          <a:noFill/>
+        </p:spPr>
+        <p:txBody>
+          <a:bodyPr wrap="square">
+            <a:spAutoFit/>
+          </a:bodyPr>
+          <a:lstStyle/>
+          <a:p>
+            <a:pPr>
+              <a:spcBef>
+                <a:spcPts val="0"/>
+              </a:spcBef>
+            </a:pPr>
+            <a:r>
+              <a:rPr sz="1300" b="1">
+                <a:solidFill>
+                  <a:srgbClr val="1F2A3C"/>
+                </a:solidFill>
+              </a:rPr>
+              <a:t>📘 Real Story Excellence Playbook v2</a:t>
+            </a:r>
+          </a:p>
+          <a:p>
+            <a:r>
+              <a:rPr sz="1100">
+                <a:solidFill>
+                  <a:srgbClr val="4A5568"/>
+                </a:solidFill>
+              </a:rPr>
+              <a:t>Replaces the prior platform-curated rubric. Source doc lives in the repo at docs/playbook/story-excellence-v2.docx.</a:t>
+            </a:r>
+          </a:p>
+          <a:p>
+            <a:pPr>
+              <a:spcBef>
+                <a:spcPts val="800"/>
+              </a:spcBef>
+            </a:pPr>
+            <a:r>
+              <a:rPr sz="1300" b="1">
+                <a:solidFill>
+                  <a:srgbClr val="1F2A3C"/>
+                </a:solidFill>
+              </a:rPr>
+              <a:t>🧩 Composite rubrics — base + domain extension</a:t>
+            </a:r>
+          </a:p>
+          <a:p>
+            <a:r>
+              <a:rPr sz="1100">
+                <a:solidFill>
+                  <a:srgbClr val="4A5568"/>
+                </a:solidFill>
+              </a:rPr>
+              <a:t>Universal Story / Feature / Epic / Defect base, optional Data, CapMkts, SF Origination, MF Servicing, and Risk extensions.</a:t>
+            </a:r>
+          </a:p>
+          <a:p>
+            <a:pPr>
+              <a:spcBef>
+                <a:spcPts val="800"/>
+              </a:spcBef>
+            </a:pPr>
+            <a:r>
+              <a:rPr sz="1300" b="1">
+                <a:solidFill>
+                  <a:srgbClr val="1F2A3C"/>
+                </a:solidFill>
+              </a:rPr>
+              <a:t>✏️ Domain Editor — in-app rubric authoring</a:t>
+            </a:r>
+          </a:p>
+          <a:p>
+            <a:r>
+              <a:rPr sz="1100">
+                <a:solidFill>
+                  <a:srgbClr val="4A5568"/>
+                </a:solidFill>
+              </a:rPr>
+              <a:t>Stewards review, edit, save, reset, and create extensions at /quality-domains. Backups on save; path-traversal protected.</a:t>
+            </a:r>
+          </a:p>
+          <a:p>
+            <a:pPr>
+              <a:spcBef>
+                <a:spcPts val="800"/>
+              </a:spcBef>
+            </a:pPr>
+            <a:r>
+              <a:rPr sz="1300" b="1">
+                <a:solidFill>
+                  <a:srgbClr val="1F2A3C"/>
+                </a:solidFill>
+              </a:rPr>
+              <a:t>✨ 'What good looks like' — inline + AI rewrite</a:t>
+            </a:r>
+          </a:p>
+          <a:p>
+            <a:r>
+              <a:rPr sz="1100">
+                <a:solidFill>
+                  <a:srgbClr val="4A5568"/>
+                </a:solidFill>
+              </a:rPr>
+              <a:t>Failed criteria show the playbook's good_example next to the fix. Click to generate a full AI rewrite, structured per criterion. Cached per (story, rubric).</a:t>
+            </a:r>
+          </a:p>
+        </p:txBody>
+      </p:sp>
+      <p:sp>
+        <p:nvSpPr>
+          <p:cNvPr id="6" name="TextBox 5"/>
+          <p:cNvSpPr txBox="1"/>
+          <p:nvPr/>
+        </p:nvSpPr>
+        <p:spPr>
+          <a:xfrm>
+            <a:off x="6400800" y="2286000"/>
+            <a:ext cx="5303520" cy="4114800"/>
+          </a:xfrm>
+          <a:prstGeom prst="rect">
+            <a:avLst/>
+          </a:prstGeom>
+          <a:noFill/>
+        </p:spPr>
+        <p:txBody>
+          <a:bodyPr wrap="square">
+            <a:spAutoFit/>
+          </a:bodyPr>
+          <a:lstStyle/>
+          <a:p>
+            <a:pPr>
+              <a:spcBef>
+                <a:spcPts val="0"/>
+              </a:spcBef>
+            </a:pPr>
+            <a:r>
+              <a:rPr sz="1300" b="1">
+                <a:solidFill>
+                  <a:srgbClr val="1F2A3C"/>
+                </a:solidFill>
+              </a:rPr>
+              <a:t>🚩 Disputes from Analytics, Teams, and Lineage</a:t>
+            </a:r>
+          </a:p>
+          <a:p>
+            <a:r>
+              <a:rPr sz="1100">
+                <a:solidFill>
+                  <a:srgbClr val="4A5568"/>
+                </a:solidFill>
+              </a:rPr>
+              <a:t>Inline 'Flag classification' button on every story-detail panel. All disputes flow into the same /disputes triage queue.</a:t>
+            </a:r>
+          </a:p>
+          <a:p>
+            <a:pPr>
+              <a:spcBef>
+                <a:spcPts val="800"/>
+              </a:spcBef>
+            </a:pPr>
+            <a:r>
+              <a:rPr sz="1300" b="1">
+                <a:solidFill>
+                  <a:srgbClr val="1F2A3C"/>
+                </a:solidFill>
+              </a:rPr>
+              <a:t>🔀 File Merger — full overhaul</a:t>
+            </a:r>
+          </a:p>
+          <a:p>
+            <a:r>
+              <a:rPr sz="1100">
+                <a:solidFill>
+                  <a:srgbClr val="4A5568"/>
+                </a:solidFill>
+              </a:rPr>
+              <a:t>Name-based join, per-file column mapping, two-phase upload + confirm, five clickable status cards, full row click-to-detail.</a:t>
+            </a:r>
+          </a:p>
+          <a:p>
+            <a:pPr>
+              <a:spcBef>
+                <a:spcPts val="800"/>
+              </a:spcBef>
+            </a:pPr>
+            <a:r>
+              <a:rPr sz="1300" b="1">
+                <a:solidFill>
+                  <a:srgbClr val="1F2A3C"/>
+                </a:solidFill>
+              </a:rPr>
+              <a:t>📊 Admin → Usage Analytics (new)</a:t>
+            </a:r>
+          </a:p>
+          <a:p>
+            <a:r>
+              <a:rPr sz="1100">
+                <a:solidFill>
+                  <a:srgbClr val="4A5568"/>
+                </a:solidFill>
+              </a:rPr>
+              <a:t>Aggregate, anonymous tracking of feature use and AI token spend. Identifies retirement candidates. No row-level data captured.</a:t>
+            </a:r>
+          </a:p>
+          <a:p>
+            <a:pPr>
+              <a:spcBef>
+                <a:spcPts val="800"/>
+              </a:spcBef>
+            </a:pPr>
+            <a:r>
+              <a:rPr sz="1300" b="1">
+                <a:solidFill>
+                  <a:srgbClr val="1F2A3C"/>
+                </a:solidFill>
+              </a:rPr>
+              <a:t>🧭 Tools → Admin</a:t>
+            </a:r>
+          </a:p>
+          <a:p>
+            <a:r>
+              <a:rPr sz="1100">
+                <a:solidFill>
+                  <a:srgbClr val="4A5568"/>
+                </a:solidFill>
+              </a:rPr>
+              <a:t>Top-nav 'Tools' renamed; File Merger, WAF Reference, Aliases, Domain Editor, and Usage Analytics now grouped under Admin.</a:t>
+            </a:r>
+          </a:p>
+        </p:txBody>
+      </p:sp>
+      <p:sp>
+        <p:nvSpPr>
+          <p:cNvPr id="7" name="TextBox 6"/>
+          <p:cNvSpPr txBox="1"/>
+          <p:nvPr/>
+        </p:nvSpPr>
+        <p:spPr>
+          <a:xfrm>
+            <a:off x="548640" y="6446520"/>
+            <a:ext cx="7315200" cy="365760"/>
+          </a:xfrm>
+          <a:prstGeom prst="rect">
+            <a:avLst/>
+          </a:prstGeom>
+          <a:noFill/>
+        </p:spPr>
+        <p:txBody>
+          <a:bodyPr wrap="square">
+            <a:spAutoFit/>
+          </a:bodyPr>
+          <a:lstStyle/>
+          <a:p>
+            <a:r>
+              <a:rPr sz="900" b="0">
+                <a:solidFill>
+                  <a:srgbClr val="A0A0A0"/>
+                </a:solidFill>
+              </a:rPr>
+              <a:t>WAF Classifier  ·  Capabilities Overview</a:t>
+            </a:r>
+          </a:p>
+        </p:txBody>
+      </p:sp>
+      <p:sp>
+        <p:nvSpPr>
+          <p:cNvPr id="8" name="TextBox 7"/>
+          <p:cNvSpPr txBox="1"/>
+          <p:nvPr/>
+        </p:nvSpPr>
+        <p:spPr>
+          <a:xfrm>
+            <a:off x="10515600" y="6446520"/>
+            <a:ext cx="1280160" cy="365760"/>
+          </a:xfrm>
+          <a:prstGeom prst="rect">
+            <a:avLst/>
+          </a:prstGeom>
+          <a:noFill/>
+        </p:spPr>
+        <p:txBody>
+          <a:bodyPr wrap="square">
+            <a:spAutoFit/>
+          </a:bodyPr>
+          <a:lstStyle/>
+          <a:p>
+            <a:r>
+              <a:rPr sz="900" b="0">
+                <a:solidFill>
+                  <a:srgbClr val="A0A0A0"/>
+                </a:solidFill>
+              </a:rPr>
+              <a:t>14 / 14</a:t>
             </a:r>
           </a:p>
         </p:txBody>

--- a/static/WAF_Classifier_Capabilities.pptx
+++ b/static/WAF_Classifier_Capabilities.pptx
@@ -18,7 +18,6 @@
     <p:sldId id="266" r:id="rId17"/>
     <p:sldId id="267" r:id="rId18"/>
     <p:sldId id="268" r:id="rId19"/>
-    <p:sldId id="269" r:id="rId20"/>
   </p:sldIdLst>
   <p:sldSz cx="12188952" cy="6858000" type="screen4x3"/>
   <p:notesSz cx="6858000" cy="9144000"/>
@@ -6438,7 +6437,7 @@
                   <a:srgbClr val="0F111A"/>
                 </a:solidFill>
               </a:rPr>
-              <a:t>🏆 Story Quality — Definition of Ready</a:t>
+              <a:t>🏆 Backlog Quality — Definition of Ready + Author</a:t>
             </a:r>
           </a:p>
         </p:txBody>
@@ -6472,7 +6471,7 @@
                   <a:srgbClr val="6B7396"/>
                 </a:solidFill>
               </a:rPr>
-              <a:t>Score every story against a 9-criterion DoR rubric — then use AI to refine or fully rewrite stories that don't pass.</a:t>
+              <a:t>Score Stories / Features / Epics / Defects against a level-aware DoR rubric — then refine, rewrite, or draft new items from intent. Calibrated with reference exemplars + per-criterion good_example.</a:t>
             </a:r>
           </a:p>
         </p:txBody>
@@ -6711,7 +6710,7 @@
                   <a:srgbClr val="0F111A"/>
                 </a:solidFill>
               </a:rPr>
-              <a:t>Batch DoR Scoring</a:t>
+              <a:t>Level-Aware DoR Scoring</a:t>
             </a:r>
           </a:p>
         </p:txBody>
@@ -6745,7 +6744,7 @@
                   <a:srgbClr val="6B7396"/>
                 </a:solidFill>
               </a:rPr>
-              <a:t>Scores every story against 9 criteria: Narrative Format, Source Data, Business Rules, Output Artifact, Acceptance Criteria, Data Quality Checks, Traceability, Story Points, Dependencies. Each criterion gets a pass/fail with a short reason.</a:t>
+              <a:t>Scores every Story / Feature / Epic / Defect against its own DoR rubric (7 criteria each, sourced from Story Excellence Playbook v2). Optional domain extensions (CapMkts, Data, MF, SF, Risk) add LoB-specific criteria. Pass/fail per criterion with the AI's specific reasoning.</a:t>
             </a:r>
           </a:p>
         </p:txBody>
@@ -6826,7 +6825,7 @@
                   <a:srgbClr val="1E223A"/>
                 </a:solidFill>
               </a:rPr>
-              <a:t>💬</a:t>
+              <a:t>✨</a:t>
             </a:r>
           </a:p>
         </p:txBody>
@@ -6941,7 +6940,7 @@
                   <a:srgbClr val="0F111A"/>
                 </a:solidFill>
               </a:rPr>
-              <a:t>Story Improvement Chat</a:t>
+              <a:t>Author — Draft from Intent</a:t>
             </a:r>
           </a:p>
         </p:txBody>
@@ -6975,7 +6974,7 @@
                   <a:srgbClr val="6B7396"/>
                 </a:solidFill>
               </a:rPr>
-              <a:t>Open a chat against a specific story. The AI suggests targeted improvements for whichever criteria are failing — collaborative, iterative refinement without rewriting the whole story.</a:t>
+              <a:t>Start from a one-line idea or rough draft and the AI produces a structured DoR-passing item. Same calibration plumbing as scoring: composite rubric, per-criterion good_example, reference exemplars + optional per-call paste-box. Structured (Markdown) or Narrative output mode.</a:t>
             </a:r>
           </a:p>
         </p:txBody>
@@ -7171,7 +7170,7 @@
                   <a:srgbClr val="0F111A"/>
                 </a:solidFill>
               </a:rPr>
-              <a:t>AI Story Rewrite</a:t>
+              <a:t>AI Rewrite — What good looks like</a:t>
             </a:r>
           </a:p>
         </p:txBody>
@@ -7205,7 +7204,7 @@
                   <a:srgbClr val="6B7396"/>
                 </a:solidFill>
               </a:rPr>
-              <a:t>One click for the AI to produce a fully rewritten version of the story addressing all failing criteria, in the correct narrative format — ready to copy back into JIRA.</a:t>
+              <a:t>One click for the AI to fully rewrite a failing item against all failing criteria, in the correct format. Cached in-process so re-clicks are free; pass force=true to bypass.</a:t>
             </a:r>
           </a:p>
         </p:txBody>
@@ -7219,7 +7218,7 @@
         <p:spPr>
           <a:xfrm>
             <a:off x="502920" y="3310128"/>
-            <a:ext cx="5440680" cy="1609344"/>
+            <a:ext cx="3566160" cy="1609344"/>
           </a:xfrm>
           <a:prstGeom prst="roundRect">
             <a:avLst>
@@ -7286,7 +7285,7 @@
                   <a:srgbClr val="1E223A"/>
                 </a:solidFill>
               </a:rPr>
-              <a:t>📊</a:t>
+              <a:t>💬</a:t>
             </a:r>
           </a:p>
         </p:txBody>
@@ -7299,7 +7298,237 @@
         </p:nvSpPr>
         <p:spPr>
           <a:xfrm>
-            <a:off x="5029200" y="3429000"/>
+            <a:off x="3246120" y="3429000"/>
+            <a:ext cx="713232" cy="190500"/>
+          </a:xfrm>
+          <a:prstGeom prst="roundRect">
+            <a:avLst>
+              <a:gd name="adj" fmla="val 4000"/>
+            </a:avLst>
+          </a:prstGeom>
+          <a:solidFill>
+            <a:srgbClr val="EDEBFF"/>
+          </a:solidFill>
+          <a:ln w="9525">
+            <a:solidFill>
+              <a:srgbClr val="EDEBFF"/>
+            </a:solidFill>
+          </a:ln>
+        </p:spPr>
+        <p:style>
+          <a:lnRef idx="1">
+            <a:schemeClr val="accent1"/>
+          </a:lnRef>
+          <a:fillRef idx="3">
+            <a:schemeClr val="accent1"/>
+          </a:fillRef>
+          <a:effectRef idx="2">
+            <a:schemeClr val="accent1"/>
+          </a:effectRef>
+          <a:fontRef idx="minor">
+            <a:schemeClr val="lt1"/>
+          </a:fontRef>
+        </p:style>
+        <p:txBody>
+          <a:bodyPr rtlCol="0" anchor="ctr"/>
+          <a:lstStyle/>
+          <a:p>
+            <a:pPr algn="ctr"/>
+          </a:p>
+        </p:txBody>
+      </p:sp>
+      <p:sp>
+        <p:nvSpPr>
+          <p:cNvPr id="29" name="TextBox 28"/>
+          <p:cNvSpPr txBox="1"/>
+          <p:nvPr/>
+        </p:nvSpPr>
+        <p:spPr>
+          <a:xfrm>
+            <a:off x="3246120" y="3416300"/>
+            <a:ext cx="713232" cy="215900"/>
+          </a:xfrm>
+          <a:prstGeom prst="rect">
+            <a:avLst/>
+          </a:prstGeom>
+          <a:noFill/>
+        </p:spPr>
+        <p:txBody>
+          <a:bodyPr wrap="square">
+            <a:spAutoFit/>
+          </a:bodyPr>
+          <a:lstStyle/>
+          <a:p>
+            <a:pPr algn="ctr"/>
+            <a:r>
+              <a:rPr sz="750" b="1" i="0">
+                <a:solidFill>
+                  <a:srgbClr val="4A40CC"/>
+                </a:solidFill>
+              </a:rPr>
+              <a:t>🤖  LLM</a:t>
+            </a:r>
+          </a:p>
+        </p:txBody>
+      </p:sp>
+      <p:sp>
+        <p:nvSpPr>
+          <p:cNvPr id="30" name="TextBox 29"/>
+          <p:cNvSpPr txBox="1"/>
+          <p:nvPr/>
+        </p:nvSpPr>
+        <p:spPr>
+          <a:xfrm>
+            <a:off x="649224" y="3694176"/>
+            <a:ext cx="3273552" cy="256032"/>
+          </a:xfrm>
+          <a:prstGeom prst="rect">
+            <a:avLst/>
+          </a:prstGeom>
+          <a:noFill/>
+        </p:spPr>
+        <p:txBody>
+          <a:bodyPr wrap="square">
+            <a:spAutoFit/>
+          </a:bodyPr>
+          <a:lstStyle/>
+          <a:p>
+            <a:pPr algn="l"/>
+            <a:r>
+              <a:rPr sz="1100" b="1" i="0">
+                <a:solidFill>
+                  <a:srgbClr val="0F111A"/>
+                </a:solidFill>
+              </a:rPr>
+              <a:t>Improvement Chat</a:t>
+            </a:r>
+          </a:p>
+        </p:txBody>
+      </p:sp>
+      <p:sp>
+        <p:nvSpPr>
+          <p:cNvPr id="31" name="TextBox 30"/>
+          <p:cNvSpPr txBox="1"/>
+          <p:nvPr/>
+        </p:nvSpPr>
+        <p:spPr>
+          <a:xfrm>
+            <a:off x="649224" y="3931920"/>
+            <a:ext cx="3273552" cy="914400"/>
+          </a:xfrm>
+          <a:prstGeom prst="rect">
+            <a:avLst/>
+          </a:prstGeom>
+          <a:noFill/>
+        </p:spPr>
+        <p:txBody>
+          <a:bodyPr wrap="square">
+            <a:spAutoFit/>
+          </a:bodyPr>
+          <a:lstStyle/>
+          <a:p>
+            <a:pPr algn="l"/>
+            <a:r>
+              <a:rPr sz="950" b="0" i="0">
+                <a:solidFill>
+                  <a:srgbClr val="6B7396"/>
+                </a:solidFill>
+              </a:rPr>
+              <a:t>Open an iterative chat against a specific item. The AI suggests targeted improvements for whichever criteria are failing — collaborative refinement without rewriting the whole item.</a:t>
+            </a:r>
+          </a:p>
+        </p:txBody>
+      </p:sp>
+      <p:sp>
+        <p:nvSpPr>
+          <p:cNvPr id="32" name="Rounded Rectangle 31"/>
+          <p:cNvSpPr/>
+          <p:nvPr/>
+        </p:nvSpPr>
+        <p:spPr>
+          <a:xfrm>
+            <a:off x="4233672" y="3310128"/>
+            <a:ext cx="3566160" cy="1609344"/>
+          </a:xfrm>
+          <a:prstGeom prst="roundRect">
+            <a:avLst>
+              <a:gd name="adj" fmla="val 4000"/>
+            </a:avLst>
+          </a:prstGeom>
+          <a:solidFill>
+            <a:srgbClr val="FFFFFF"/>
+          </a:solidFill>
+          <a:ln w="9525">
+            <a:solidFill>
+              <a:srgbClr val="D8DCEE"/>
+            </a:solidFill>
+          </a:ln>
+        </p:spPr>
+        <p:style>
+          <a:lnRef idx="1">
+            <a:schemeClr val="accent1"/>
+          </a:lnRef>
+          <a:fillRef idx="3">
+            <a:schemeClr val="accent1"/>
+          </a:fillRef>
+          <a:effectRef idx="2">
+            <a:schemeClr val="accent1"/>
+          </a:effectRef>
+          <a:fontRef idx="minor">
+            <a:schemeClr val="lt1"/>
+          </a:fontRef>
+        </p:style>
+        <p:txBody>
+          <a:bodyPr rtlCol="0" anchor="ctr"/>
+          <a:lstStyle/>
+          <a:p>
+            <a:pPr algn="ctr"/>
+          </a:p>
+        </p:txBody>
+      </p:sp>
+      <p:sp>
+        <p:nvSpPr>
+          <p:cNvPr id="33" name="TextBox 32"/>
+          <p:cNvSpPr txBox="1"/>
+          <p:nvPr/>
+        </p:nvSpPr>
+        <p:spPr>
+          <a:xfrm>
+            <a:off x="4379976" y="3401568"/>
+            <a:ext cx="347472" cy="347472"/>
+          </a:xfrm>
+          <a:prstGeom prst="rect">
+            <a:avLst/>
+          </a:prstGeom>
+          <a:noFill/>
+        </p:spPr>
+        <p:txBody>
+          <a:bodyPr wrap="square">
+            <a:spAutoFit/>
+          </a:bodyPr>
+          <a:lstStyle/>
+          <a:p>
+            <a:pPr algn="l"/>
+            <a:r>
+              <a:rPr sz="1500" b="0" i="0">
+                <a:solidFill>
+                  <a:srgbClr val="1E223A"/>
+                </a:solidFill>
+              </a:rPr>
+              <a:t>📊</a:t>
+            </a:r>
+          </a:p>
+        </p:txBody>
+      </p:sp>
+      <p:sp>
+        <p:nvSpPr>
+          <p:cNvPr id="34" name="Rounded Rectangle 33"/>
+          <p:cNvSpPr/>
+          <p:nvPr/>
+        </p:nvSpPr>
+        <p:spPr>
+          <a:xfrm>
+            <a:off x="6885432" y="3429000"/>
             <a:ext cx="804672" cy="190500"/>
           </a:xfrm>
           <a:prstGeom prst="roundRect">
@@ -7340,13 +7569,13 @@
       </p:sp>
       <p:sp>
         <p:nvSpPr>
-          <p:cNvPr id="29" name="TextBox 28"/>
-          <p:cNvSpPr txBox="1"/>
-          <p:nvPr/>
-        </p:nvSpPr>
-        <p:spPr>
-          <a:xfrm>
-            <a:off x="5029200" y="3416300"/>
+          <p:cNvPr id="35" name="TextBox 34"/>
+          <p:cNvSpPr txBox="1"/>
+          <p:nvPr/>
+        </p:nvSpPr>
+        <p:spPr>
+          <a:xfrm>
+            <a:off x="6885432" y="3416300"/>
             <a:ext cx="804672" cy="215900"/>
           </a:xfrm>
           <a:prstGeom prst="rect">
@@ -7374,14 +7603,14 @@
       </p:sp>
       <p:sp>
         <p:nvSpPr>
-          <p:cNvPr id="30" name="TextBox 29"/>
-          <p:cNvSpPr txBox="1"/>
-          <p:nvPr/>
-        </p:nvSpPr>
-        <p:spPr>
-          <a:xfrm>
-            <a:off x="649224" y="3694176"/>
-            <a:ext cx="5148072" cy="256032"/>
+          <p:cNvPr id="36" name="TextBox 35"/>
+          <p:cNvSpPr txBox="1"/>
+          <p:nvPr/>
+        </p:nvSpPr>
+        <p:spPr>
+          <a:xfrm>
+            <a:off x="4379976" y="3694176"/>
+            <a:ext cx="3273552" cy="256032"/>
           </a:xfrm>
           <a:prstGeom prst="rect">
             <a:avLst/>
@@ -7401,21 +7630,21 @@
                   <a:srgbClr val="0F111A"/>
                 </a:solidFill>
               </a:rPr>
-              <a:t>Quality Results &amp; History</a:t>
-            </a:r>
-          </a:p>
-        </p:txBody>
-      </p:sp>
-      <p:sp>
-        <p:nvSpPr>
-          <p:cNvPr id="31" name="TextBox 30"/>
-          <p:cNvSpPr txBox="1"/>
-          <p:nvPr/>
-        </p:nvSpPr>
-        <p:spPr>
-          <a:xfrm>
-            <a:off x="649224" y="3931920"/>
-            <a:ext cx="5148072" cy="914400"/>
+              <a:t>Results, Run History &amp; Export</a:t>
+            </a:r>
+          </a:p>
+        </p:txBody>
+      </p:sp>
+      <p:sp>
+        <p:nvSpPr>
+          <p:cNvPr id="37" name="TextBox 36"/>
+          <p:cNvSpPr txBox="1"/>
+          <p:nvPr/>
+        </p:nvSpPr>
+        <p:spPr>
+          <a:xfrm>
+            <a:off x="4379976" y="3931920"/>
+            <a:ext cx="3273552" cy="914400"/>
           </a:xfrm>
           <a:prstGeom prst="rect">
             <a:avLst/>
@@ -7435,21 +7664,21 @@
                   <a:srgbClr val="6B7396"/>
                 </a:solidFill>
               </a:rPr>
-              <a:t>Browse scoring results by upload, team, or scoring run. See aggregate Ready / Needs Work / Not Ready counts, per-criterion pass rates, and score trends across multiple runs.</a:t>
-            </a:r>
-          </a:p>
-        </p:txBody>
-      </p:sp>
-      <p:sp>
-        <p:nvSpPr>
-          <p:cNvPr id="32" name="Rounded Rectangle 31"/>
+              <a:t>Browse scoring results by upload, team, level, domain, or scoring run. Run History columns include Level + Domain + Items count. Export CSV with per-criterion pass/fail, overall score, band, and full metadata.</a:t>
+            </a:r>
+          </a:p>
+        </p:txBody>
+      </p:sp>
+      <p:sp>
+        <p:nvSpPr>
+          <p:cNvPr id="38" name="Rounded Rectangle 37"/>
           <p:cNvSpPr/>
           <p:nvPr/>
         </p:nvSpPr>
         <p:spPr>
           <a:xfrm>
-            <a:off x="6108192" y="3310128"/>
-            <a:ext cx="5440680" cy="1609344"/>
+            <a:off x="7964424" y="3310128"/>
+            <a:ext cx="3566160" cy="1609344"/>
           </a:xfrm>
           <a:prstGeom prst="roundRect">
             <a:avLst>
@@ -7489,13 +7718,13 @@
       </p:sp>
       <p:sp>
         <p:nvSpPr>
-          <p:cNvPr id="33" name="TextBox 32"/>
-          <p:cNvSpPr txBox="1"/>
-          <p:nvPr/>
-        </p:nvSpPr>
-        <p:spPr>
-          <a:xfrm>
-            <a:off x="6254496" y="3401568"/>
+          <p:cNvPr id="39" name="TextBox 38"/>
+          <p:cNvSpPr txBox="1"/>
+          <p:nvPr/>
+        </p:nvSpPr>
+        <p:spPr>
+          <a:xfrm>
+            <a:off x="8110728" y="3401568"/>
             <a:ext cx="347472" cy="347472"/>
           </a:xfrm>
           <a:prstGeom prst="rect">
@@ -7516,20 +7745,20 @@
                   <a:srgbClr val="1E223A"/>
                 </a:solidFill>
               </a:rPr>
-              <a:t>📤</a:t>
-            </a:r>
-          </a:p>
-        </p:txBody>
-      </p:sp>
-      <p:sp>
-        <p:nvSpPr>
-          <p:cNvPr id="34" name="Rounded Rectangle 33"/>
+              <a:t>⚙️</a:t>
+            </a:r>
+          </a:p>
+        </p:txBody>
+      </p:sp>
+      <p:sp>
+        <p:nvSpPr>
+          <p:cNvPr id="40" name="Rounded Rectangle 39"/>
           <p:cNvSpPr/>
           <p:nvPr/>
         </p:nvSpPr>
         <p:spPr>
           <a:xfrm>
-            <a:off x="10634472" y="3429000"/>
+            <a:off x="10616184" y="3429000"/>
             <a:ext cx="804672" cy="190500"/>
           </a:xfrm>
           <a:prstGeom prst="roundRect">
@@ -7570,13 +7799,13 @@
       </p:sp>
       <p:sp>
         <p:nvSpPr>
-          <p:cNvPr id="35" name="TextBox 34"/>
-          <p:cNvSpPr txBox="1"/>
-          <p:nvPr/>
-        </p:nvSpPr>
-        <p:spPr>
-          <a:xfrm>
-            <a:off x="10634472" y="3416300"/>
+          <p:cNvPr id="41" name="TextBox 40"/>
+          <p:cNvSpPr txBox="1"/>
+          <p:nvPr/>
+        </p:nvSpPr>
+        <p:spPr>
+          <a:xfrm>
+            <a:off x="10616184" y="3416300"/>
             <a:ext cx="804672" cy="215900"/>
           </a:xfrm>
           <a:prstGeom prst="rect">
@@ -7604,14 +7833,14 @@
       </p:sp>
       <p:sp>
         <p:nvSpPr>
-          <p:cNvPr id="36" name="TextBox 35"/>
-          <p:cNvSpPr txBox="1"/>
-          <p:nvPr/>
-        </p:nvSpPr>
-        <p:spPr>
-          <a:xfrm>
-            <a:off x="6254496" y="3694176"/>
-            <a:ext cx="5148072" cy="256032"/>
+          <p:cNvPr id="42" name="TextBox 41"/>
+          <p:cNvSpPr txBox="1"/>
+          <p:nvPr/>
+        </p:nvSpPr>
+        <p:spPr>
+          <a:xfrm>
+            <a:off x="8110728" y="3694176"/>
+            <a:ext cx="3273552" cy="256032"/>
           </a:xfrm>
           <a:prstGeom prst="rect">
             <a:avLst/>
@@ -7631,21 +7860,21 @@
                   <a:srgbClr val="0F111A"/>
                 </a:solidFill>
               </a:rPr>
-              <a:t>Quality Export</a:t>
-            </a:r>
-          </a:p>
-        </p:txBody>
-      </p:sp>
-      <p:sp>
-        <p:nvSpPr>
-          <p:cNvPr id="37" name="TextBox 36"/>
-          <p:cNvSpPr txBox="1"/>
-          <p:nvPr/>
-        </p:nvSpPr>
-        <p:spPr>
-          <a:xfrm>
-            <a:off x="6254496" y="3931920"/>
-            <a:ext cx="5148072" cy="914400"/>
+              <a:t>Domain Editor + Exemplars</a:t>
+            </a:r>
+          </a:p>
+        </p:txBody>
+      </p:sp>
+      <p:sp>
+        <p:nvSpPr>
+          <p:cNvPr id="43" name="TextBox 42"/>
+          <p:cNvSpPr txBox="1"/>
+          <p:nvPr/>
+        </p:nvSpPr>
+        <p:spPr>
+          <a:xfrm>
+            <a:off x="8110728" y="3931920"/>
+            <a:ext cx="3273552" cy="914400"/>
           </a:xfrm>
           <a:prstGeom prst="rect">
             <a:avLst/>
@@ -7665,14 +7894,14 @@
                   <a:srgbClr val="6B7396"/>
                 </a:solidFill>
               </a:rPr>
-              <a:t>Download results as CSV — one row per story with pass/fail for all 9 criteria, overall score percentage, and team/epic metadata for downstream reporting.</a:t>
-            </a:r>
-          </a:p>
-        </p:txBody>
-      </p:sp>
-      <p:sp>
-        <p:nvSpPr>
-          <p:cNvPr id="38" name="Rounded Rectangle 37"/>
+              <a:t>Domain stewards review and edit DoR criteria in-app at /quality-domains — no code changes. New Exemplars tab stores passing items per rubric, fed into every scoring + rewrite + Author call as REFERENCE EXEMPLARS to set the org's bar.</a:t>
+            </a:r>
+          </a:p>
+        </p:txBody>
+      </p:sp>
+      <p:sp>
+        <p:nvSpPr>
+          <p:cNvPr id="44" name="Rounded Rectangle 43"/>
           <p:cNvSpPr/>
           <p:nvPr/>
         </p:nvSpPr>
@@ -7719,7 +7948,7 @@
       </p:sp>
       <p:sp>
         <p:nvSpPr>
-          <p:cNvPr id="39" name="TextBox 38"/>
+          <p:cNvPr id="45" name="TextBox 44"/>
           <p:cNvSpPr txBox="1"/>
           <p:nvPr/>
         </p:nvSpPr>
@@ -7753,7 +7982,7 @@
       </p:sp>
       <p:sp>
         <p:nvSpPr>
-          <p:cNvPr id="40" name="Rounded Rectangle 39"/>
+          <p:cNvPr id="46" name="Rounded Rectangle 45"/>
           <p:cNvSpPr/>
           <p:nvPr/>
         </p:nvSpPr>
@@ -7800,7 +8029,7 @@
       </p:sp>
       <p:sp>
         <p:nvSpPr>
-          <p:cNvPr id="41" name="TextBox 40"/>
+          <p:cNvPr id="47" name="TextBox 46"/>
           <p:cNvSpPr txBox="1"/>
           <p:nvPr/>
         </p:nvSpPr>
@@ -7834,7 +8063,7 @@
       </p:sp>
       <p:sp>
         <p:nvSpPr>
-          <p:cNvPr id="42" name="TextBox 41"/>
+          <p:cNvPr id="48" name="TextBox 47"/>
           <p:cNvSpPr txBox="1"/>
           <p:nvPr/>
         </p:nvSpPr>
@@ -7868,7 +8097,7 @@
       </p:sp>
       <p:sp>
         <p:nvSpPr>
-          <p:cNvPr id="43" name="Rounded Rectangle 42"/>
+          <p:cNvPr id="49" name="Rounded Rectangle 48"/>
           <p:cNvSpPr/>
           <p:nvPr/>
         </p:nvSpPr>
@@ -7915,7 +8144,7 @@
       </p:sp>
       <p:sp>
         <p:nvSpPr>
-          <p:cNvPr id="44" name="TextBox 43"/>
+          <p:cNvPr id="50" name="TextBox 49"/>
           <p:cNvSpPr txBox="1"/>
           <p:nvPr/>
         </p:nvSpPr>
@@ -7949,7 +8178,7 @@
       </p:sp>
       <p:sp>
         <p:nvSpPr>
-          <p:cNvPr id="45" name="TextBox 44"/>
+          <p:cNvPr id="51" name="TextBox 50"/>
           <p:cNvSpPr txBox="1"/>
           <p:nvPr/>
         </p:nvSpPr>
@@ -7983,7 +8212,7 @@
       </p:sp>
       <p:sp>
         <p:nvSpPr>
-          <p:cNvPr id="46" name="Rounded Rectangle 45"/>
+          <p:cNvPr id="52" name="Rounded Rectangle 51"/>
           <p:cNvSpPr/>
           <p:nvPr/>
         </p:nvSpPr>
@@ -8030,7 +8259,7 @@
       </p:sp>
       <p:sp>
         <p:nvSpPr>
-          <p:cNvPr id="47" name="TextBox 46"/>
+          <p:cNvPr id="53" name="TextBox 52"/>
           <p:cNvSpPr txBox="1"/>
           <p:nvPr/>
         </p:nvSpPr>
@@ -8064,7 +8293,7 @@
       </p:sp>
       <p:sp>
         <p:nvSpPr>
-          <p:cNvPr id="48" name="TextBox 47"/>
+          <p:cNvPr id="54" name="TextBox 53"/>
           <p:cNvSpPr txBox="1"/>
           <p:nvPr/>
         </p:nvSpPr>
@@ -8098,7 +8327,7 @@
       </p:sp>
       <p:sp>
         <p:nvSpPr>
-          <p:cNvPr id="49" name="Rectangle 48"/>
+          <p:cNvPr id="55" name="Rectangle 54"/>
           <p:cNvSpPr/>
           <p:nvPr/>
         </p:nvSpPr>
@@ -8143,7 +8372,7 @@
       </p:sp>
       <p:sp>
         <p:nvSpPr>
-          <p:cNvPr id="50" name="Rectangle 49"/>
+          <p:cNvPr id="56" name="Rectangle 55"/>
           <p:cNvSpPr/>
           <p:nvPr/>
         </p:nvSpPr>
@@ -8186,7 +8415,7 @@
       </p:sp>
       <p:sp>
         <p:nvSpPr>
-          <p:cNvPr id="51" name="TextBox 50"/>
+          <p:cNvPr id="57" name="TextBox 56"/>
           <p:cNvSpPr txBox="1"/>
           <p:nvPr/>
         </p:nvSpPr>
@@ -8220,7 +8449,7 @@
       </p:sp>
       <p:sp>
         <p:nvSpPr>
-          <p:cNvPr id="52" name="TextBox 51"/>
+          <p:cNvPr id="58" name="TextBox 57"/>
           <p:cNvSpPr txBox="1"/>
           <p:nvPr/>
         </p:nvSpPr>
@@ -11800,435 +12029,6 @@
 </p:sld>
 </file>
 
-<file path=ppt/slides/slide14.xml><?xml version="1.0" encoding="utf-8"?>
-<p:sld xmlns:a="http://schemas.openxmlformats.org/drawingml/2006/main" xmlns:p="http://schemas.openxmlformats.org/presentationml/2006/main" xmlns:r="http://schemas.openxmlformats.org/officeDocument/2006/relationships">
-  <p:cSld>
-    <p:spTree>
-      <p:nvGrpSpPr>
-        <p:cNvPr id="1" name=""/>
-        <p:cNvGrpSpPr/>
-        <p:nvPr/>
-      </p:nvGrpSpPr>
-      <p:grpSpPr/>
-      <p:sp>
-        <p:nvSpPr>
-          <p:cNvPr id="2" name="TextBox 1"/>
-          <p:cNvSpPr txBox="1"/>
-          <p:nvPr/>
-        </p:nvSpPr>
-        <p:spPr>
-          <a:xfrm>
-            <a:off x="548640" y="411480"/>
-            <a:ext cx="5486400" cy="365760"/>
-          </a:xfrm>
-          <a:prstGeom prst="rect">
-            <a:avLst/>
-          </a:prstGeom>
-          <a:noFill/>
-        </p:spPr>
-        <p:txBody>
-          <a:bodyPr wrap="square">
-            <a:spAutoFit/>
-          </a:bodyPr>
-          <a:lstStyle/>
-          <a:p>
-            <a:r>
-              <a:rPr sz="1100" b="1">
-                <a:solidFill>
-                  <a:srgbClr val="A0A0A0"/>
-                </a:solidFill>
-              </a:rPr>
-              <a:t>WHAT'S NEW</a:t>
-            </a:r>
-          </a:p>
-        </p:txBody>
-      </p:sp>
-      <p:sp>
-        <p:nvSpPr>
-          <p:cNvPr id="3" name="TextBox 2"/>
-          <p:cNvSpPr txBox="1"/>
-          <p:nvPr/>
-        </p:nvSpPr>
-        <p:spPr>
-          <a:xfrm>
-            <a:off x="548640" y="777240"/>
-            <a:ext cx="10972800" cy="822960"/>
-          </a:xfrm>
-          <a:prstGeom prst="rect">
-            <a:avLst/>
-          </a:prstGeom>
-          <a:noFill/>
-        </p:spPr>
-        <p:txBody>
-          <a:bodyPr wrap="square">
-            <a:spAutoFit/>
-          </a:bodyPr>
-          <a:lstStyle/>
-          <a:p>
-            <a:r>
-              <a:rPr sz="3400" b="1">
-                <a:solidFill>
-                  <a:srgbClr val="1F2A3C"/>
-                </a:solidFill>
-              </a:rPr>
-              <a:t>v3.7 — May 2026</a:t>
-            </a:r>
-          </a:p>
-        </p:txBody>
-      </p:sp>
-      <p:sp>
-        <p:nvSpPr>
-          <p:cNvPr id="4" name="TextBox 3"/>
-          <p:cNvSpPr txBox="1"/>
-          <p:nvPr/>
-        </p:nvSpPr>
-        <p:spPr>
-          <a:xfrm>
-            <a:off x="548640" y="1554480"/>
-            <a:ext cx="10972800" cy="457200"/>
-          </a:xfrm>
-          <a:prstGeom prst="rect">
-            <a:avLst/>
-          </a:prstGeom>
-          <a:noFill/>
-        </p:spPr>
-        <p:txBody>
-          <a:bodyPr wrap="square">
-            <a:spAutoFit/>
-          </a:bodyPr>
-          <a:lstStyle/>
-          <a:p>
-            <a:r>
-              <a:rPr sz="1400" b="0">
-                <a:solidFill>
-                  <a:srgbClr val="556075"/>
-                </a:solidFill>
-              </a:rPr>
-              <a:t>Composite rubrics, in-app domain authoring, broader dispute coverage, and aggregate observability.</a:t>
-            </a:r>
-          </a:p>
-        </p:txBody>
-      </p:sp>
-      <p:sp>
-        <p:nvSpPr>
-          <p:cNvPr id="5" name="TextBox 4"/>
-          <p:cNvSpPr txBox="1"/>
-          <p:nvPr/>
-        </p:nvSpPr>
-        <p:spPr>
-          <a:xfrm>
-            <a:off x="548640" y="2286000"/>
-            <a:ext cx="5303520" cy="4114800"/>
-          </a:xfrm>
-          <a:prstGeom prst="rect">
-            <a:avLst/>
-          </a:prstGeom>
-          <a:noFill/>
-        </p:spPr>
-        <p:txBody>
-          <a:bodyPr wrap="square">
-            <a:spAutoFit/>
-          </a:bodyPr>
-          <a:lstStyle/>
-          <a:p>
-            <a:pPr>
-              <a:spcBef>
-                <a:spcPts val="0"/>
-              </a:spcBef>
-            </a:pPr>
-            <a:r>
-              <a:rPr sz="1300" b="1">
-                <a:solidFill>
-                  <a:srgbClr val="1F2A3C"/>
-                </a:solidFill>
-              </a:rPr>
-              <a:t>📘 Real Story Excellence Playbook v2</a:t>
-            </a:r>
-          </a:p>
-          <a:p>
-            <a:r>
-              <a:rPr sz="1100">
-                <a:solidFill>
-                  <a:srgbClr val="4A5568"/>
-                </a:solidFill>
-              </a:rPr>
-              <a:t>Replaces the prior platform-curated rubric. Source doc lives in the repo at docs/playbook/story-excellence-v2.docx.</a:t>
-            </a:r>
-          </a:p>
-          <a:p>
-            <a:pPr>
-              <a:spcBef>
-                <a:spcPts val="800"/>
-              </a:spcBef>
-            </a:pPr>
-            <a:r>
-              <a:rPr sz="1300" b="1">
-                <a:solidFill>
-                  <a:srgbClr val="1F2A3C"/>
-                </a:solidFill>
-              </a:rPr>
-              <a:t>🧩 Composite rubrics — base + domain extension</a:t>
-            </a:r>
-          </a:p>
-          <a:p>
-            <a:r>
-              <a:rPr sz="1100">
-                <a:solidFill>
-                  <a:srgbClr val="4A5568"/>
-                </a:solidFill>
-              </a:rPr>
-              <a:t>Universal Story / Feature / Epic / Defect base, optional Data, CapMkts, SF Origination, MF Servicing, and Risk extensions.</a:t>
-            </a:r>
-          </a:p>
-          <a:p>
-            <a:pPr>
-              <a:spcBef>
-                <a:spcPts val="800"/>
-              </a:spcBef>
-            </a:pPr>
-            <a:r>
-              <a:rPr sz="1300" b="1">
-                <a:solidFill>
-                  <a:srgbClr val="1F2A3C"/>
-                </a:solidFill>
-              </a:rPr>
-              <a:t>✏️ Domain Editor — in-app rubric authoring</a:t>
-            </a:r>
-          </a:p>
-          <a:p>
-            <a:r>
-              <a:rPr sz="1100">
-                <a:solidFill>
-                  <a:srgbClr val="4A5568"/>
-                </a:solidFill>
-              </a:rPr>
-              <a:t>Stewards review, edit, save, reset, and create extensions at /quality-domains. Backups on save; path-traversal protected.</a:t>
-            </a:r>
-          </a:p>
-          <a:p>
-            <a:pPr>
-              <a:spcBef>
-                <a:spcPts val="800"/>
-              </a:spcBef>
-            </a:pPr>
-            <a:r>
-              <a:rPr sz="1300" b="1">
-                <a:solidFill>
-                  <a:srgbClr val="1F2A3C"/>
-                </a:solidFill>
-              </a:rPr>
-              <a:t>✨ 'What good looks like' — inline + AI rewrite</a:t>
-            </a:r>
-          </a:p>
-          <a:p>
-            <a:r>
-              <a:rPr sz="1100">
-                <a:solidFill>
-                  <a:srgbClr val="4A5568"/>
-                </a:solidFill>
-              </a:rPr>
-              <a:t>Failed criteria show the playbook's good_example next to the fix. Click to generate a full AI rewrite, structured per criterion. Cached per (story, rubric).</a:t>
-            </a:r>
-          </a:p>
-        </p:txBody>
-      </p:sp>
-      <p:sp>
-        <p:nvSpPr>
-          <p:cNvPr id="6" name="TextBox 5"/>
-          <p:cNvSpPr txBox="1"/>
-          <p:nvPr/>
-        </p:nvSpPr>
-        <p:spPr>
-          <a:xfrm>
-            <a:off x="6400800" y="2286000"/>
-            <a:ext cx="5303520" cy="4114800"/>
-          </a:xfrm>
-          <a:prstGeom prst="rect">
-            <a:avLst/>
-          </a:prstGeom>
-          <a:noFill/>
-        </p:spPr>
-        <p:txBody>
-          <a:bodyPr wrap="square">
-            <a:spAutoFit/>
-          </a:bodyPr>
-          <a:lstStyle/>
-          <a:p>
-            <a:pPr>
-              <a:spcBef>
-                <a:spcPts val="0"/>
-              </a:spcBef>
-            </a:pPr>
-            <a:r>
-              <a:rPr sz="1300" b="1">
-                <a:solidFill>
-                  <a:srgbClr val="1F2A3C"/>
-                </a:solidFill>
-              </a:rPr>
-              <a:t>🚩 Disputes from Analytics, Teams, and Lineage</a:t>
-            </a:r>
-          </a:p>
-          <a:p>
-            <a:r>
-              <a:rPr sz="1100">
-                <a:solidFill>
-                  <a:srgbClr val="4A5568"/>
-                </a:solidFill>
-              </a:rPr>
-              <a:t>Inline 'Flag classification' button on every story-detail panel. All disputes flow into the same /disputes triage queue.</a:t>
-            </a:r>
-          </a:p>
-          <a:p>
-            <a:pPr>
-              <a:spcBef>
-                <a:spcPts val="800"/>
-              </a:spcBef>
-            </a:pPr>
-            <a:r>
-              <a:rPr sz="1300" b="1">
-                <a:solidFill>
-                  <a:srgbClr val="1F2A3C"/>
-                </a:solidFill>
-              </a:rPr>
-              <a:t>🔀 File Merger — full overhaul</a:t>
-            </a:r>
-          </a:p>
-          <a:p>
-            <a:r>
-              <a:rPr sz="1100">
-                <a:solidFill>
-                  <a:srgbClr val="4A5568"/>
-                </a:solidFill>
-              </a:rPr>
-              <a:t>Name-based join, per-file column mapping, two-phase upload + confirm, five clickable status cards, full row click-to-detail.</a:t>
-            </a:r>
-          </a:p>
-          <a:p>
-            <a:pPr>
-              <a:spcBef>
-                <a:spcPts val="800"/>
-              </a:spcBef>
-            </a:pPr>
-            <a:r>
-              <a:rPr sz="1300" b="1">
-                <a:solidFill>
-                  <a:srgbClr val="1F2A3C"/>
-                </a:solidFill>
-              </a:rPr>
-              <a:t>📊 Admin → Usage Analytics (new)</a:t>
-            </a:r>
-          </a:p>
-          <a:p>
-            <a:r>
-              <a:rPr sz="1100">
-                <a:solidFill>
-                  <a:srgbClr val="4A5568"/>
-                </a:solidFill>
-              </a:rPr>
-              <a:t>Aggregate, anonymous tracking of feature use and AI token spend. Identifies retirement candidates. No row-level data captured.</a:t>
-            </a:r>
-          </a:p>
-          <a:p>
-            <a:pPr>
-              <a:spcBef>
-                <a:spcPts val="800"/>
-              </a:spcBef>
-            </a:pPr>
-            <a:r>
-              <a:rPr sz="1300" b="1">
-                <a:solidFill>
-                  <a:srgbClr val="1F2A3C"/>
-                </a:solidFill>
-              </a:rPr>
-              <a:t>🧭 Tools → Admin</a:t>
-            </a:r>
-          </a:p>
-          <a:p>
-            <a:r>
-              <a:rPr sz="1100">
-                <a:solidFill>
-                  <a:srgbClr val="4A5568"/>
-                </a:solidFill>
-              </a:rPr>
-              <a:t>Top-nav 'Tools' renamed; File Merger, WAF Reference, Aliases, Domain Editor, and Usage Analytics now grouped under Admin.</a:t>
-            </a:r>
-          </a:p>
-        </p:txBody>
-      </p:sp>
-      <p:sp>
-        <p:nvSpPr>
-          <p:cNvPr id="7" name="TextBox 6"/>
-          <p:cNvSpPr txBox="1"/>
-          <p:nvPr/>
-        </p:nvSpPr>
-        <p:spPr>
-          <a:xfrm>
-            <a:off x="548640" y="6446520"/>
-            <a:ext cx="7315200" cy="365760"/>
-          </a:xfrm>
-          <a:prstGeom prst="rect">
-            <a:avLst/>
-          </a:prstGeom>
-          <a:noFill/>
-        </p:spPr>
-        <p:txBody>
-          <a:bodyPr wrap="square">
-            <a:spAutoFit/>
-          </a:bodyPr>
-          <a:lstStyle/>
-          <a:p>
-            <a:r>
-              <a:rPr sz="900" b="0">
-                <a:solidFill>
-                  <a:srgbClr val="A0A0A0"/>
-                </a:solidFill>
-              </a:rPr>
-              <a:t>WAF Classifier  ·  Capabilities Overview</a:t>
-            </a:r>
-          </a:p>
-        </p:txBody>
-      </p:sp>
-      <p:sp>
-        <p:nvSpPr>
-          <p:cNvPr id="8" name="TextBox 7"/>
-          <p:cNvSpPr txBox="1"/>
-          <p:nvPr/>
-        </p:nvSpPr>
-        <p:spPr>
-          <a:xfrm>
-            <a:off x="10515600" y="6446520"/>
-            <a:ext cx="1280160" cy="365760"/>
-          </a:xfrm>
-          <a:prstGeom prst="rect">
-            <a:avLst/>
-          </a:prstGeom>
-          <a:noFill/>
-        </p:spPr>
-        <p:txBody>
-          <a:bodyPr wrap="square">
-            <a:spAutoFit/>
-          </a:bodyPr>
-          <a:lstStyle/>
-          <a:p>
-            <a:r>
-              <a:rPr sz="900" b="0">
-                <a:solidFill>
-                  <a:srgbClr val="A0A0A0"/>
-                </a:solidFill>
-              </a:rPr>
-              <a:t>14 / 14</a:t>
-            </a:r>
-          </a:p>
-        </p:txBody>
-      </p:sp>
-    </p:spTree>
-  </p:cSld>
-  <p:clrMapOvr>
-    <a:masterClrMapping/>
-  </p:clrMapOvr>
-</p:sld>
-</file>
-
 <file path=ppt/slides/slide2.xml><?xml version="1.0" encoding="utf-8"?>
 <p:sld xmlns:a="http://schemas.openxmlformats.org/drawingml/2006/main" xmlns:p="http://schemas.openxmlformats.org/presentationml/2006/main" xmlns:r="http://schemas.openxmlformats.org/officeDocument/2006/relationships">
   <p:cSld>
@@ -15087,7 +14887,7 @@
                   <a:srgbClr val="0F111A"/>
                 </a:solidFill>
               </a:rPr>
-              <a:t>Story Quality</a:t>
+              <a:t>Backlog Quality</a:t>
             </a:r>
           </a:p>
         </p:txBody>
@@ -15121,7 +14921,7 @@
                   <a:srgbClr val="1E223A"/>
                 </a:solidFill>
               </a:rPr>
-              <a:t>AI-powered Definition of Ready scoring, chat refinement, and story rewrites</a:t>
+              <a:t>AI-powered DoR scoring, chat refinement, rewrite, and free-form Authoring</a:t>
             </a:r>
           </a:p>
         </p:txBody>
@@ -15155,7 +14955,7 @@
                   <a:srgbClr val="5B52E8"/>
                 </a:solidFill>
               </a:rPr>
-              <a:t>5 capabilities</a:t>
+              <a:t>6 capabilities</a:t>
             </a:r>
           </a:p>
         </p:txBody>
@@ -20758,7 +20558,7 @@
                   <a:srgbClr val="1E223A"/>
                 </a:solidFill>
               </a:rPr>
-              <a:t>Story Quality</a:t>
+              <a:t>Backlog Quality</a:t>
             </a:r>
           </a:p>
         </p:txBody>
@@ -20819,7 +20619,7 @@
         <p:spPr>
           <a:xfrm>
             <a:off x="8065008" y="4005072"/>
-            <a:ext cx="2084832" cy="182880"/>
+            <a:ext cx="2316480" cy="182880"/>
           </a:xfrm>
           <a:prstGeom prst="roundRect">
             <a:avLst>
@@ -20884,7 +20684,7 @@
                   <a:srgbClr val="5B52E8"/>
                 </a:solidFill>
               </a:rPr>
-              <a:t>3/5</a:t>
+              <a:t>4/6</a:t>
             </a:r>
           </a:p>
         </p:txBody>
@@ -22383,7 +22183,7 @@
                   <a:srgbClr val="0F111A"/>
                 </a:solidFill>
               </a:rPr>
-              <a:t>🏆 Story Quality</a:t>
+              <a:t>🏆 Backlog Quality</a:t>
             </a:r>
           </a:p>
         </p:txBody>
